--- a/RISCVstage3.pptx
+++ b/RISCVstage3.pptx
@@ -4,6 +4,9 @@
   <p:sldMasterIdLst>
     <p:sldMasterId id="2147483648" r:id="rId1"/>
   </p:sldMasterIdLst>
+  <p:notesMasterIdLst>
+    <p:notesMasterId r:id="rId3"/>
+  </p:notesMasterIdLst>
   <p:sldIdLst>
     <p:sldId id="256" r:id="rId2"/>
   </p:sldIdLst>
@@ -477,6 +480,439 @@
 </pc:chgInfo>
 </file>
 
+<file path=ppt/notesMasters/notesMaster1.xml><?xml version="1.0" encoding="utf-8"?>
+<p:notesMaster xmlns:a="http://schemas.openxmlformats.org/drawingml/2006/main" xmlns:r="http://schemas.openxmlformats.org/officeDocument/2006/relationships" xmlns:p="http://schemas.openxmlformats.org/presentationml/2006/main">
+  <p:cSld>
+    <p:bg>
+      <p:bgRef idx="1001">
+        <a:schemeClr val="bg1"/>
+      </p:bgRef>
+    </p:bg>
+    <p:spTree>
+      <p:nvGrpSpPr>
+        <p:cNvPr id="1" name=""/>
+        <p:cNvGrpSpPr/>
+        <p:nvPr/>
+      </p:nvGrpSpPr>
+      <p:grpSpPr>
+        <a:xfrm>
+          <a:off x="0" y="0"/>
+          <a:ext cx="0" cy="0"/>
+          <a:chOff x="0" y="0"/>
+          <a:chExt cx="0" cy="0"/>
+        </a:xfrm>
+      </p:grpSpPr>
+      <p:sp>
+        <p:nvSpPr>
+          <p:cNvPr id="2" name="Header Placeholder 1"/>
+          <p:cNvSpPr>
+            <a:spLocks noGrp="1"/>
+          </p:cNvSpPr>
+          <p:nvPr>
+            <p:ph type="hdr" sz="quarter"/>
+          </p:nvPr>
+        </p:nvSpPr>
+        <p:spPr>
+          <a:xfrm>
+            <a:off x="0" y="0"/>
+            <a:ext cx="3103563" cy="473075"/>
+          </a:xfrm>
+          <a:prstGeom prst="rect">
+            <a:avLst/>
+          </a:prstGeom>
+        </p:spPr>
+        <p:txBody>
+          <a:bodyPr vert="horz" lIns="91440" tIns="45720" rIns="91440" bIns="45720" rtlCol="0"/>
+          <a:lstStyle>
+            <a:lvl1pPr algn="l">
+              <a:defRPr sz="1200"/>
+            </a:lvl1pPr>
+          </a:lstStyle>
+          <a:p>
+            <a:endParaRPr lang="en-US"/>
+          </a:p>
+        </p:txBody>
+      </p:sp>
+      <p:sp>
+        <p:nvSpPr>
+          <p:cNvPr id="3" name="Date Placeholder 2"/>
+          <p:cNvSpPr>
+            <a:spLocks noGrp="1"/>
+          </p:cNvSpPr>
+          <p:nvPr>
+            <p:ph type="dt" idx="1"/>
+          </p:nvPr>
+        </p:nvSpPr>
+        <p:spPr>
+          <a:xfrm>
+            <a:off x="4057650" y="0"/>
+            <a:ext cx="3103563" cy="473075"/>
+          </a:xfrm>
+          <a:prstGeom prst="rect">
+            <a:avLst/>
+          </a:prstGeom>
+        </p:spPr>
+        <p:txBody>
+          <a:bodyPr vert="horz" lIns="91440" tIns="45720" rIns="91440" bIns="45720" rtlCol="0"/>
+          <a:lstStyle>
+            <a:lvl1pPr algn="r">
+              <a:defRPr sz="1200"/>
+            </a:lvl1pPr>
+          </a:lstStyle>
+          <a:p>
+            <a:fld id="{06FCF6AB-26F5-45AE-AED4-4D9C1E2EDF66}" type="datetimeFigureOut">
+              <a:rPr lang="en-US" smtClean="0"/>
+              <a:t>4/26/2026</a:t>
+            </a:fld>
+            <a:endParaRPr lang="en-US"/>
+          </a:p>
+        </p:txBody>
+      </p:sp>
+      <p:sp>
+        <p:nvSpPr>
+          <p:cNvPr id="4" name="Slide Image Placeholder 3"/>
+          <p:cNvSpPr>
+            <a:spLocks noGrp="1" noRot="1" noChangeAspect="1"/>
+          </p:cNvSpPr>
+          <p:nvPr>
+            <p:ph type="sldImg" idx="2"/>
+          </p:nvPr>
+        </p:nvSpPr>
+        <p:spPr>
+          <a:xfrm>
+            <a:off x="746125" y="1181100"/>
+            <a:ext cx="5670550" cy="3189288"/>
+          </a:xfrm>
+          <a:prstGeom prst="rect">
+            <a:avLst/>
+          </a:prstGeom>
+          <a:noFill/>
+          <a:ln w="12700">
+            <a:solidFill>
+              <a:prstClr val="black"/>
+            </a:solidFill>
+          </a:ln>
+        </p:spPr>
+        <p:txBody>
+          <a:bodyPr vert="horz" lIns="91440" tIns="45720" rIns="91440" bIns="45720" rtlCol="0" anchor="ctr"/>
+          <a:lstStyle/>
+          <a:p>
+            <a:endParaRPr lang="en-US"/>
+          </a:p>
+        </p:txBody>
+      </p:sp>
+      <p:sp>
+        <p:nvSpPr>
+          <p:cNvPr id="5" name="Notes Placeholder 4"/>
+          <p:cNvSpPr>
+            <a:spLocks noGrp="1"/>
+          </p:cNvSpPr>
+          <p:nvPr>
+            <p:ph type="body" sz="quarter" idx="3"/>
+          </p:nvPr>
+        </p:nvSpPr>
+        <p:spPr>
+          <a:xfrm>
+            <a:off x="715963" y="4546600"/>
+            <a:ext cx="5730875" cy="3721100"/>
+          </a:xfrm>
+          <a:prstGeom prst="rect">
+            <a:avLst/>
+          </a:prstGeom>
+        </p:spPr>
+        <p:txBody>
+          <a:bodyPr vert="horz" lIns="91440" tIns="45720" rIns="91440" bIns="45720" rtlCol="0"/>
+          <a:lstStyle/>
+          <a:p>
+            <a:pPr lvl="0"/>
+            <a:r>
+              <a:rPr lang="en-US"/>
+              <a:t>Click to edit Master text styles</a:t>
+            </a:r>
+          </a:p>
+          <a:p>
+            <a:pPr lvl="1"/>
+            <a:r>
+              <a:rPr lang="en-US"/>
+              <a:t>Second level</a:t>
+            </a:r>
+          </a:p>
+          <a:p>
+            <a:pPr lvl="2"/>
+            <a:r>
+              <a:rPr lang="en-US"/>
+              <a:t>Third level</a:t>
+            </a:r>
+          </a:p>
+          <a:p>
+            <a:pPr lvl="3"/>
+            <a:r>
+              <a:rPr lang="en-US"/>
+              <a:t>Fourth level</a:t>
+            </a:r>
+          </a:p>
+          <a:p>
+            <a:pPr lvl="4"/>
+            <a:r>
+              <a:rPr lang="en-US"/>
+              <a:t>Fifth level</a:t>
+            </a:r>
+          </a:p>
+        </p:txBody>
+      </p:sp>
+      <p:sp>
+        <p:nvSpPr>
+          <p:cNvPr id="6" name="Footer Placeholder 5"/>
+          <p:cNvSpPr>
+            <a:spLocks noGrp="1"/>
+          </p:cNvSpPr>
+          <p:nvPr>
+            <p:ph type="ftr" sz="quarter" idx="4"/>
+          </p:nvPr>
+        </p:nvSpPr>
+        <p:spPr>
+          <a:xfrm>
+            <a:off x="0" y="8975725"/>
+            <a:ext cx="3103563" cy="473075"/>
+          </a:xfrm>
+          <a:prstGeom prst="rect">
+            <a:avLst/>
+          </a:prstGeom>
+        </p:spPr>
+        <p:txBody>
+          <a:bodyPr vert="horz" lIns="91440" tIns="45720" rIns="91440" bIns="45720" rtlCol="0" anchor="b"/>
+          <a:lstStyle>
+            <a:lvl1pPr algn="l">
+              <a:defRPr sz="1200"/>
+            </a:lvl1pPr>
+          </a:lstStyle>
+          <a:p>
+            <a:endParaRPr lang="en-US"/>
+          </a:p>
+        </p:txBody>
+      </p:sp>
+      <p:sp>
+        <p:nvSpPr>
+          <p:cNvPr id="7" name="Slide Number Placeholder 6"/>
+          <p:cNvSpPr>
+            <a:spLocks noGrp="1"/>
+          </p:cNvSpPr>
+          <p:nvPr>
+            <p:ph type="sldNum" sz="quarter" idx="5"/>
+          </p:nvPr>
+        </p:nvSpPr>
+        <p:spPr>
+          <a:xfrm>
+            <a:off x="4057650" y="8975725"/>
+            <a:ext cx="3103563" cy="473075"/>
+          </a:xfrm>
+          <a:prstGeom prst="rect">
+            <a:avLst/>
+          </a:prstGeom>
+        </p:spPr>
+        <p:txBody>
+          <a:bodyPr vert="horz" lIns="91440" tIns="45720" rIns="91440" bIns="45720" rtlCol="0" anchor="b"/>
+          <a:lstStyle>
+            <a:lvl1pPr algn="r">
+              <a:defRPr sz="1200"/>
+            </a:lvl1pPr>
+          </a:lstStyle>
+          <a:p>
+            <a:fld id="{F4B206E6-BEA0-449E-8B4C-16C99BC43B69}" type="slidenum">
+              <a:rPr lang="en-US" smtClean="0"/>
+              <a:t>‹#›</a:t>
+            </a:fld>
+            <a:endParaRPr lang="en-US"/>
+          </a:p>
+        </p:txBody>
+      </p:sp>
+    </p:spTree>
+    <p:extLst>
+      <p:ext uri="{BB962C8B-B14F-4D97-AF65-F5344CB8AC3E}">
+        <p14:creationId xmlns:p14="http://schemas.microsoft.com/office/powerpoint/2010/main" val="4057920481"/>
+      </p:ext>
+    </p:extLst>
+  </p:cSld>
+  <p:clrMap bg1="lt1" tx1="dk1" bg2="lt2" tx2="dk2" accent1="accent1" accent2="accent2" accent3="accent3" accent4="accent4" accent5="accent5" accent6="accent6" hlink="hlink" folHlink="folHlink"/>
+  <p:notesStyle>
+    <a:lvl1pPr marL="0" algn="l" defTabSz="914400" rtl="0" eaLnBrk="1" latinLnBrk="0" hangingPunct="1">
+      <a:defRPr sz="1200" kern="1200">
+        <a:solidFill>
+          <a:schemeClr val="tx1"/>
+        </a:solidFill>
+        <a:latin typeface="+mn-lt"/>
+        <a:ea typeface="+mn-ea"/>
+        <a:cs typeface="+mn-cs"/>
+      </a:defRPr>
+    </a:lvl1pPr>
+    <a:lvl2pPr marL="457200" algn="l" defTabSz="914400" rtl="0" eaLnBrk="1" latinLnBrk="0" hangingPunct="1">
+      <a:defRPr sz="1200" kern="1200">
+        <a:solidFill>
+          <a:schemeClr val="tx1"/>
+        </a:solidFill>
+        <a:latin typeface="+mn-lt"/>
+        <a:ea typeface="+mn-ea"/>
+        <a:cs typeface="+mn-cs"/>
+      </a:defRPr>
+    </a:lvl2pPr>
+    <a:lvl3pPr marL="914400" algn="l" defTabSz="914400" rtl="0" eaLnBrk="1" latinLnBrk="0" hangingPunct="1">
+      <a:defRPr sz="1200" kern="1200">
+        <a:solidFill>
+          <a:schemeClr val="tx1"/>
+        </a:solidFill>
+        <a:latin typeface="+mn-lt"/>
+        <a:ea typeface="+mn-ea"/>
+        <a:cs typeface="+mn-cs"/>
+      </a:defRPr>
+    </a:lvl3pPr>
+    <a:lvl4pPr marL="1371600" algn="l" defTabSz="914400" rtl="0" eaLnBrk="1" latinLnBrk="0" hangingPunct="1">
+      <a:defRPr sz="1200" kern="1200">
+        <a:solidFill>
+          <a:schemeClr val="tx1"/>
+        </a:solidFill>
+        <a:latin typeface="+mn-lt"/>
+        <a:ea typeface="+mn-ea"/>
+        <a:cs typeface="+mn-cs"/>
+      </a:defRPr>
+    </a:lvl4pPr>
+    <a:lvl5pPr marL="1828800" algn="l" defTabSz="914400" rtl="0" eaLnBrk="1" latinLnBrk="0" hangingPunct="1">
+      <a:defRPr sz="1200" kern="1200">
+        <a:solidFill>
+          <a:schemeClr val="tx1"/>
+        </a:solidFill>
+        <a:latin typeface="+mn-lt"/>
+        <a:ea typeface="+mn-ea"/>
+        <a:cs typeface="+mn-cs"/>
+      </a:defRPr>
+    </a:lvl5pPr>
+    <a:lvl6pPr marL="2286000" algn="l" defTabSz="914400" rtl="0" eaLnBrk="1" latinLnBrk="0" hangingPunct="1">
+      <a:defRPr sz="1200" kern="1200">
+        <a:solidFill>
+          <a:schemeClr val="tx1"/>
+        </a:solidFill>
+        <a:latin typeface="+mn-lt"/>
+        <a:ea typeface="+mn-ea"/>
+        <a:cs typeface="+mn-cs"/>
+      </a:defRPr>
+    </a:lvl6pPr>
+    <a:lvl7pPr marL="2743200" algn="l" defTabSz="914400" rtl="0" eaLnBrk="1" latinLnBrk="0" hangingPunct="1">
+      <a:defRPr sz="1200" kern="1200">
+        <a:solidFill>
+          <a:schemeClr val="tx1"/>
+        </a:solidFill>
+        <a:latin typeface="+mn-lt"/>
+        <a:ea typeface="+mn-ea"/>
+        <a:cs typeface="+mn-cs"/>
+      </a:defRPr>
+    </a:lvl7pPr>
+    <a:lvl8pPr marL="3200400" algn="l" defTabSz="914400" rtl="0" eaLnBrk="1" latinLnBrk="0" hangingPunct="1">
+      <a:defRPr sz="1200" kern="1200">
+        <a:solidFill>
+          <a:schemeClr val="tx1"/>
+        </a:solidFill>
+        <a:latin typeface="+mn-lt"/>
+        <a:ea typeface="+mn-ea"/>
+        <a:cs typeface="+mn-cs"/>
+      </a:defRPr>
+    </a:lvl8pPr>
+    <a:lvl9pPr marL="3657600" algn="l" defTabSz="914400" rtl="0" eaLnBrk="1" latinLnBrk="0" hangingPunct="1">
+      <a:defRPr sz="1200" kern="1200">
+        <a:solidFill>
+          <a:schemeClr val="tx1"/>
+        </a:solidFill>
+        <a:latin typeface="+mn-lt"/>
+        <a:ea typeface="+mn-ea"/>
+        <a:cs typeface="+mn-cs"/>
+      </a:defRPr>
+    </a:lvl9pPr>
+  </p:notesStyle>
+</p:notesMaster>
+</file>
+
+<file path=ppt/notesSlides/notesSlide1.xml><?xml version="1.0" encoding="utf-8"?>
+<p:notes xmlns:a="http://schemas.openxmlformats.org/drawingml/2006/main" xmlns:r="http://schemas.openxmlformats.org/officeDocument/2006/relationships" xmlns:p="http://schemas.openxmlformats.org/presentationml/2006/main">
+  <p:cSld>
+    <p:spTree>
+      <p:nvGrpSpPr>
+        <p:cNvPr id="1" name=""/>
+        <p:cNvGrpSpPr/>
+        <p:nvPr/>
+      </p:nvGrpSpPr>
+      <p:grpSpPr>
+        <a:xfrm>
+          <a:off x="0" y="0"/>
+          <a:ext cx="0" cy="0"/>
+          <a:chOff x="0" y="0"/>
+          <a:chExt cx="0" cy="0"/>
+        </a:xfrm>
+      </p:grpSpPr>
+      <p:sp>
+        <p:nvSpPr>
+          <p:cNvPr id="2" name="Slide Image Placeholder 1"/>
+          <p:cNvSpPr>
+            <a:spLocks noGrp="1" noRot="1" noChangeAspect="1"/>
+          </p:cNvSpPr>
+          <p:nvPr>
+            <p:ph type="sldImg"/>
+          </p:nvPr>
+        </p:nvSpPr>
+        <p:spPr/>
+      </p:sp>
+      <p:sp>
+        <p:nvSpPr>
+          <p:cNvPr id="3" name="Notes Placeholder 2"/>
+          <p:cNvSpPr>
+            <a:spLocks noGrp="1"/>
+          </p:cNvSpPr>
+          <p:nvPr>
+            <p:ph type="body" idx="1"/>
+          </p:nvPr>
+        </p:nvSpPr>
+        <p:spPr/>
+        <p:txBody>
+          <a:bodyPr/>
+          <a:lstStyle/>
+          <a:p>
+            <a:endParaRPr lang="en-US" dirty="0"/>
+          </a:p>
+        </p:txBody>
+      </p:sp>
+      <p:sp>
+        <p:nvSpPr>
+          <p:cNvPr id="4" name="Slide Number Placeholder 3"/>
+          <p:cNvSpPr>
+            <a:spLocks noGrp="1"/>
+          </p:cNvSpPr>
+          <p:nvPr>
+            <p:ph type="sldNum" sz="quarter" idx="5"/>
+          </p:nvPr>
+        </p:nvSpPr>
+        <p:spPr/>
+        <p:txBody>
+          <a:bodyPr/>
+          <a:lstStyle/>
+          <a:p>
+            <a:fld id="{F4B206E6-BEA0-449E-8B4C-16C99BC43B69}" type="slidenum">
+              <a:rPr lang="en-US" smtClean="0"/>
+              <a:t>1</a:t>
+            </a:fld>
+            <a:endParaRPr lang="en-US"/>
+          </a:p>
+        </p:txBody>
+      </p:sp>
+    </p:spTree>
+    <p:extLst>
+      <p:ext uri="{BB962C8B-B14F-4D97-AF65-F5344CB8AC3E}">
+        <p14:creationId xmlns:p14="http://schemas.microsoft.com/office/powerpoint/2010/main" val="1318781306"/>
+      </p:ext>
+    </p:extLst>
+  </p:cSld>
+  <p:clrMapOvr>
+    <a:masterClrMapping/>
+  </p:clrMapOvr>
+</p:notes>
+</file>
+
 <file path=ppt/slideLayouts/slideLayout1.xml><?xml version="1.0" encoding="utf-8"?>
 <p:sldLayout xmlns:a="http://schemas.openxmlformats.org/drawingml/2006/main" xmlns:r="http://schemas.openxmlformats.org/officeDocument/2006/relationships" xmlns:p="http://schemas.openxmlformats.org/presentationml/2006/main" type="title" preserve="1">
   <p:cSld name="Title Slide">
@@ -624,7 +1060,7 @@
           <a:p>
             <a:fld id="{51AFF834-1BEC-4F95-9622-28B5DCC1FE16}" type="datetimeFigureOut">
               <a:rPr lang="en-US" smtClean="0"/>
-              <a:t>3/10/2026</a:t>
+              <a:t>4/25/2026</a:t>
             </a:fld>
             <a:endParaRPr lang="en-US"/>
           </a:p>
@@ -822,7 +1258,7 @@
           <a:p>
             <a:fld id="{51AFF834-1BEC-4F95-9622-28B5DCC1FE16}" type="datetimeFigureOut">
               <a:rPr lang="en-US" smtClean="0"/>
-              <a:t>3/10/2026</a:t>
+              <a:t>4/25/2026</a:t>
             </a:fld>
             <a:endParaRPr lang="en-US"/>
           </a:p>
@@ -1030,7 +1466,7 @@
           <a:p>
             <a:fld id="{51AFF834-1BEC-4F95-9622-28B5DCC1FE16}" type="datetimeFigureOut">
               <a:rPr lang="en-US" smtClean="0"/>
-              <a:t>3/10/2026</a:t>
+              <a:t>4/25/2026</a:t>
             </a:fld>
             <a:endParaRPr lang="en-US"/>
           </a:p>
@@ -1228,7 +1664,7 @@
           <a:p>
             <a:fld id="{51AFF834-1BEC-4F95-9622-28B5DCC1FE16}" type="datetimeFigureOut">
               <a:rPr lang="en-US" smtClean="0"/>
-              <a:t>3/10/2026</a:t>
+              <a:t>4/25/2026</a:t>
             </a:fld>
             <a:endParaRPr lang="en-US"/>
           </a:p>
@@ -1503,7 +1939,7 @@
           <a:p>
             <a:fld id="{51AFF834-1BEC-4F95-9622-28B5DCC1FE16}" type="datetimeFigureOut">
               <a:rPr lang="en-US" smtClean="0"/>
-              <a:t>3/10/2026</a:t>
+              <a:t>4/25/2026</a:t>
             </a:fld>
             <a:endParaRPr lang="en-US"/>
           </a:p>
@@ -1768,7 +2204,7 @@
           <a:p>
             <a:fld id="{51AFF834-1BEC-4F95-9622-28B5DCC1FE16}" type="datetimeFigureOut">
               <a:rPr lang="en-US" smtClean="0"/>
-              <a:t>3/10/2026</a:t>
+              <a:t>4/25/2026</a:t>
             </a:fld>
             <a:endParaRPr lang="en-US"/>
           </a:p>
@@ -2180,7 +2616,7 @@
           <a:p>
             <a:fld id="{51AFF834-1BEC-4F95-9622-28B5DCC1FE16}" type="datetimeFigureOut">
               <a:rPr lang="en-US" smtClean="0"/>
-              <a:t>3/10/2026</a:t>
+              <a:t>4/25/2026</a:t>
             </a:fld>
             <a:endParaRPr lang="en-US"/>
           </a:p>
@@ -2321,7 +2757,7 @@
           <a:p>
             <a:fld id="{51AFF834-1BEC-4F95-9622-28B5DCC1FE16}" type="datetimeFigureOut">
               <a:rPr lang="en-US" smtClean="0"/>
-              <a:t>3/10/2026</a:t>
+              <a:t>4/25/2026</a:t>
             </a:fld>
             <a:endParaRPr lang="en-US"/>
           </a:p>
@@ -2434,7 +2870,7 @@
           <a:p>
             <a:fld id="{51AFF834-1BEC-4F95-9622-28B5DCC1FE16}" type="datetimeFigureOut">
               <a:rPr lang="en-US" smtClean="0"/>
-              <a:t>3/10/2026</a:t>
+              <a:t>4/25/2026</a:t>
             </a:fld>
             <a:endParaRPr lang="en-US"/>
           </a:p>
@@ -2745,7 +3181,7 @@
           <a:p>
             <a:fld id="{51AFF834-1BEC-4F95-9622-28B5DCC1FE16}" type="datetimeFigureOut">
               <a:rPr lang="en-US" smtClean="0"/>
-              <a:t>3/10/2026</a:t>
+              <a:t>4/25/2026</a:t>
             </a:fld>
             <a:endParaRPr lang="en-US"/>
           </a:p>
@@ -3033,7 +3469,7 @@
           <a:p>
             <a:fld id="{51AFF834-1BEC-4F95-9622-28B5DCC1FE16}" type="datetimeFigureOut">
               <a:rPr lang="en-US" smtClean="0"/>
-              <a:t>3/10/2026</a:t>
+              <a:t>4/25/2026</a:t>
             </a:fld>
             <a:endParaRPr lang="en-US"/>
           </a:p>
@@ -3274,7 +3710,7 @@
           <a:p>
             <a:fld id="{51AFF834-1BEC-4F95-9622-28B5DCC1FE16}" type="datetimeFigureOut">
               <a:rPr lang="en-US" smtClean="0"/>
-              <a:t>3/10/2026</a:t>
+              <a:t>4/25/2026</a:t>
             </a:fld>
             <a:endParaRPr lang="en-US"/>
           </a:p>
@@ -3691,6 +4127,92 @@
           <a:chExt cx="0" cy="0"/>
         </a:xfrm>
       </p:grpSpPr>
+      <p:cxnSp>
+        <p:nvCxnSpPr>
+          <p:cNvPr id="344" name="Straight Connector 343">
+            <a:extLst>
+              <a:ext uri="{FF2B5EF4-FFF2-40B4-BE49-F238E27FC236}">
+                <a16:creationId xmlns:a16="http://schemas.microsoft.com/office/drawing/2014/main" id="{7E8DA7EA-9048-3048-F599-149D9F375B61}"/>
+              </a:ext>
+            </a:extLst>
+          </p:cNvPr>
+          <p:cNvCxnSpPr>
+            <a:cxnSpLocks/>
+          </p:cNvCxnSpPr>
+          <p:nvPr/>
+        </p:nvCxnSpPr>
+        <p:spPr>
+          <a:xfrm flipH="1">
+            <a:off x="4006133" y="5573346"/>
+            <a:ext cx="5435968" cy="0"/>
+          </a:xfrm>
+          <a:prstGeom prst="line">
+            <a:avLst/>
+          </a:prstGeom>
+          <a:ln>
+            <a:solidFill>
+              <a:srgbClr val="7030A0"/>
+            </a:solidFill>
+          </a:ln>
+        </p:spPr>
+        <p:style>
+          <a:lnRef idx="2">
+            <a:schemeClr val="accent1"/>
+          </a:lnRef>
+          <a:fillRef idx="0">
+            <a:schemeClr val="accent1"/>
+          </a:fillRef>
+          <a:effectRef idx="1">
+            <a:schemeClr val="accent1"/>
+          </a:effectRef>
+          <a:fontRef idx="minor">
+            <a:schemeClr val="tx1"/>
+          </a:fontRef>
+        </p:style>
+      </p:cxnSp>
+      <p:cxnSp>
+        <p:nvCxnSpPr>
+          <p:cNvPr id="333" name="Straight Connector 332">
+            <a:extLst>
+              <a:ext uri="{FF2B5EF4-FFF2-40B4-BE49-F238E27FC236}">
+                <a16:creationId xmlns:a16="http://schemas.microsoft.com/office/drawing/2014/main" id="{4BADE5B1-9FD4-A81A-2DDD-114802BD44F3}"/>
+              </a:ext>
+            </a:extLst>
+          </p:cNvPr>
+          <p:cNvCxnSpPr>
+            <a:cxnSpLocks/>
+          </p:cNvCxnSpPr>
+          <p:nvPr/>
+        </p:nvCxnSpPr>
+        <p:spPr>
+          <a:xfrm flipH="1">
+            <a:off x="3977662" y="5061481"/>
+            <a:ext cx="5464439" cy="0"/>
+          </a:xfrm>
+          <a:prstGeom prst="line">
+            <a:avLst/>
+          </a:prstGeom>
+          <a:ln>
+            <a:solidFill>
+              <a:srgbClr val="7030A0"/>
+            </a:solidFill>
+          </a:ln>
+        </p:spPr>
+        <p:style>
+          <a:lnRef idx="2">
+            <a:schemeClr val="accent1"/>
+          </a:lnRef>
+          <a:fillRef idx="0">
+            <a:schemeClr val="accent1"/>
+          </a:fillRef>
+          <a:effectRef idx="1">
+            <a:schemeClr val="accent1"/>
+          </a:effectRef>
+          <a:fontRef idx="minor">
+            <a:schemeClr val="tx1"/>
+          </a:fontRef>
+        </p:style>
+      </p:cxnSp>
       <p:sp>
         <p:nvSpPr>
           <p:cNvPr id="4" name="TextBox 3">
@@ -5325,48 +5847,6 @@
       </p:cxnSp>
       <p:cxnSp>
         <p:nvCxnSpPr>
-          <p:cNvPr id="73" name="Straight Arrow Connector 72">
-            <a:extLst>
-              <a:ext uri="{FF2B5EF4-FFF2-40B4-BE49-F238E27FC236}">
-                <a16:creationId xmlns:a16="http://schemas.microsoft.com/office/drawing/2014/main" id="{C458AD97-7803-3315-AF03-8F40DF1BD335}"/>
-              </a:ext>
-            </a:extLst>
-          </p:cNvPr>
-          <p:cNvCxnSpPr/>
-          <p:nvPr/>
-        </p:nvCxnSpPr>
-        <p:spPr>
-          <a:xfrm>
-            <a:off x="2155145" y="5377092"/>
-            <a:ext cx="177808" cy="0"/>
-          </a:xfrm>
-          <a:prstGeom prst="straightConnector1">
-            <a:avLst/>
-          </a:prstGeom>
-          <a:ln>
-            <a:solidFill>
-              <a:srgbClr val="FF0000"/>
-            </a:solidFill>
-            <a:tailEnd type="triangle"/>
-          </a:ln>
-        </p:spPr>
-        <p:style>
-          <a:lnRef idx="2">
-            <a:schemeClr val="accent1"/>
-          </a:lnRef>
-          <a:fillRef idx="0">
-            <a:schemeClr val="accent1"/>
-          </a:fillRef>
-          <a:effectRef idx="1">
-            <a:schemeClr val="accent1"/>
-          </a:effectRef>
-          <a:fontRef idx="minor">
-            <a:schemeClr val="tx1"/>
-          </a:fontRef>
-        </p:style>
-      </p:cxnSp>
-      <p:cxnSp>
-        <p:nvCxnSpPr>
           <p:cNvPr id="74" name="Straight Arrow Connector 73">
             <a:extLst>
               <a:ext uri="{FF2B5EF4-FFF2-40B4-BE49-F238E27FC236}">
@@ -5561,50 +6041,6 @@
           </a:fontRef>
         </p:style>
       </p:cxnSp>
-      <p:cxnSp>
-        <p:nvCxnSpPr>
-          <p:cNvPr id="89" name="Straight Arrow Connector 88">
-            <a:extLst>
-              <a:ext uri="{FF2B5EF4-FFF2-40B4-BE49-F238E27FC236}">
-                <a16:creationId xmlns:a16="http://schemas.microsoft.com/office/drawing/2014/main" id="{F54A266D-F4C6-7070-9203-F459E46AE102}"/>
-              </a:ext>
-            </a:extLst>
-          </p:cNvPr>
-          <p:cNvCxnSpPr>
-            <a:cxnSpLocks/>
-          </p:cNvCxnSpPr>
-          <p:nvPr/>
-        </p:nvCxnSpPr>
-        <p:spPr>
-          <a:xfrm>
-            <a:off x="1620962" y="4519030"/>
-            <a:ext cx="475825" cy="0"/>
-          </a:xfrm>
-          <a:prstGeom prst="straightConnector1">
-            <a:avLst/>
-          </a:prstGeom>
-          <a:ln>
-            <a:solidFill>
-              <a:srgbClr val="FF0000"/>
-            </a:solidFill>
-            <a:tailEnd type="triangle"/>
-          </a:ln>
-        </p:spPr>
-        <p:style>
-          <a:lnRef idx="2">
-            <a:schemeClr val="accent1"/>
-          </a:lnRef>
-          <a:fillRef idx="0">
-            <a:schemeClr val="accent1"/>
-          </a:fillRef>
-          <a:effectRef idx="1">
-            <a:schemeClr val="accent1"/>
-          </a:effectRef>
-          <a:fontRef idx="minor">
-            <a:schemeClr val="tx1"/>
-          </a:fontRef>
-        </p:style>
-      </p:cxnSp>
       <p:sp>
         <p:nvSpPr>
           <p:cNvPr id="90" name="Rectangle 89">
@@ -6462,12 +6898,17 @@
         </p:nvCxnSpPr>
         <p:spPr>
           <a:xfrm flipH="1">
-            <a:off x="1803638" y="4454260"/>
+            <a:off x="1658663" y="4460144"/>
             <a:ext cx="77899" cy="129540"/>
           </a:xfrm>
           <a:prstGeom prst="line">
             <a:avLst/>
           </a:prstGeom>
+          <a:ln>
+            <a:solidFill>
+              <a:srgbClr val="7030A0"/>
+            </a:solidFill>
+          </a:ln>
         </p:spPr>
         <p:style>
           <a:lnRef idx="2">
@@ -6498,7 +6939,7 @@
         </p:nvSpPr>
         <p:spPr>
           <a:xfrm>
-            <a:off x="1688197" y="4330630"/>
+            <a:off x="1587717" y="4259656"/>
             <a:ext cx="245580" cy="230832"/>
           </a:xfrm>
           <a:prstGeom prst="rect">
@@ -6514,7 +6955,11 @@
           <a:p>
             <a:pPr algn="ctr"/>
             <a:r>
-              <a:rPr lang="en-US" sz="900" dirty="0"/>
+              <a:rPr lang="en-US" sz="900" b="1" dirty="0">
+                <a:solidFill>
+                  <a:srgbClr val="7030A0"/>
+                </a:solidFill>
+              </a:rPr>
               <a:t>7</a:t>
             </a:r>
           </a:p>
@@ -6707,7 +7152,7 @@
         <p:spPr>
           <a:xfrm>
             <a:off x="2639349" y="3251607"/>
-            <a:ext cx="0" cy="1014753"/>
+            <a:ext cx="0" cy="1910817"/>
           </a:xfrm>
           <a:prstGeom prst="line">
             <a:avLst/>
@@ -7403,7 +7848,7 @@
           </a:prstGeom>
           <a:ln>
             <a:solidFill>
-              <a:srgbClr val="FF0000"/>
+              <a:srgbClr val="7030A0"/>
             </a:solidFill>
             <a:tailEnd type="triangle"/>
           </a:ln>
@@ -7432,20 +7877,22 @@
               </a:ext>
             </a:extLst>
           </p:cNvPr>
-          <p:cNvCxnSpPr/>
+          <p:cNvCxnSpPr>
+            <a:cxnSpLocks/>
+          </p:cNvCxnSpPr>
           <p:nvPr/>
         </p:nvCxnSpPr>
         <p:spPr>
           <a:xfrm flipV="1">
             <a:off x="6267546" y="3096047"/>
-            <a:ext cx="0" cy="332953"/>
+            <a:ext cx="0" cy="698880"/>
           </a:xfrm>
           <a:prstGeom prst="straightConnector1">
             <a:avLst/>
           </a:prstGeom>
           <a:ln>
             <a:solidFill>
-              <a:srgbClr val="FF0000"/>
+              <a:srgbClr val="7030A0"/>
             </a:solidFill>
             <a:tailEnd type="triangle"/>
           </a:ln>
@@ -7767,7 +8214,7 @@
           </a:prstGeom>
           <a:ln>
             <a:solidFill>
-              <a:srgbClr val="FF0000"/>
+              <a:srgbClr val="7030A0"/>
             </a:solidFill>
             <a:tailEnd type="triangle"/>
           </a:ln>
@@ -9185,7 +9632,7 @@
           </a:prstGeom>
           <a:ln>
             <a:solidFill>
-              <a:srgbClr val="FF0000"/>
+              <a:srgbClr val="7030A0"/>
             </a:solidFill>
             <a:tailEnd type="triangle"/>
           </a:ln>
@@ -9324,7 +9771,7 @@
           </a:prstGeom>
           <a:ln>
             <a:solidFill>
-              <a:srgbClr val="FF0000"/>
+              <a:srgbClr val="7030A0"/>
             </a:solidFill>
             <a:tailEnd type="triangle"/>
           </a:ln>
@@ -9441,10 +9888,10 @@
       </p:sp>
       <p:cxnSp>
         <p:nvCxnSpPr>
-          <p:cNvPr id="118" name="Straight Arrow Connector 117">
-            <a:extLst>
-              <a:ext uri="{FF2B5EF4-FFF2-40B4-BE49-F238E27FC236}">
-                <a16:creationId xmlns:a16="http://schemas.microsoft.com/office/drawing/2014/main" id="{3FFE2C33-996E-7ADF-F9EF-9E2CF7B04F43}"/>
+          <p:cNvPr id="119" name="Straight Arrow Connector 118">
+            <a:extLst>
+              <a:ext uri="{FF2B5EF4-FFF2-40B4-BE49-F238E27FC236}">
+                <a16:creationId xmlns:a16="http://schemas.microsoft.com/office/drawing/2014/main" id="{E7E3730A-42E6-0433-39FD-2ACC0255676D}"/>
               </a:ext>
             </a:extLst>
           </p:cNvPr>
@@ -9454,47 +9901,6 @@
           <p:nvPr/>
         </p:nvCxnSpPr>
         <p:spPr>
-          <a:xfrm>
-            <a:off x="2743887" y="5277871"/>
-            <a:ext cx="442253" cy="0"/>
-          </a:xfrm>
-          <a:prstGeom prst="straightConnector1">
-            <a:avLst/>
-          </a:prstGeom>
-          <a:ln>
-            <a:tailEnd type="triangle"/>
-          </a:ln>
-        </p:spPr>
-        <p:style>
-          <a:lnRef idx="2">
-            <a:schemeClr val="accent1"/>
-          </a:lnRef>
-          <a:fillRef idx="0">
-            <a:schemeClr val="accent1"/>
-          </a:fillRef>
-          <a:effectRef idx="1">
-            <a:schemeClr val="accent1"/>
-          </a:effectRef>
-          <a:fontRef idx="minor">
-            <a:schemeClr val="tx1"/>
-          </a:fontRef>
-        </p:style>
-      </p:cxnSp>
-      <p:cxnSp>
-        <p:nvCxnSpPr>
-          <p:cNvPr id="119" name="Straight Arrow Connector 118">
-            <a:extLst>
-              <a:ext uri="{FF2B5EF4-FFF2-40B4-BE49-F238E27FC236}">
-                <a16:creationId xmlns:a16="http://schemas.microsoft.com/office/drawing/2014/main" id="{E7E3730A-42E6-0433-39FD-2ACC0255676D}"/>
-              </a:ext>
-            </a:extLst>
-          </p:cNvPr>
-          <p:cNvCxnSpPr>
-            <a:cxnSpLocks/>
-          </p:cNvCxnSpPr>
-          <p:nvPr/>
-        </p:nvCxnSpPr>
-        <p:spPr>
           <a:xfrm flipH="1">
             <a:off x="3888841" y="5478179"/>
             <a:ext cx="205614" cy="0"/>
@@ -9504,48 +9910,10 @@
           </a:prstGeom>
           <a:ln>
             <a:solidFill>
-              <a:srgbClr val="FF0000"/>
+              <a:srgbClr val="7030A0"/>
             </a:solidFill>
             <a:tailEnd type="triangle"/>
           </a:ln>
-        </p:spPr>
-        <p:style>
-          <a:lnRef idx="2">
-            <a:schemeClr val="accent1"/>
-          </a:lnRef>
-          <a:fillRef idx="0">
-            <a:schemeClr val="accent1"/>
-          </a:fillRef>
-          <a:effectRef idx="1">
-            <a:schemeClr val="accent1"/>
-          </a:effectRef>
-          <a:fontRef idx="minor">
-            <a:schemeClr val="tx1"/>
-          </a:fontRef>
-        </p:style>
-      </p:cxnSp>
-      <p:cxnSp>
-        <p:nvCxnSpPr>
-          <p:cNvPr id="120" name="Straight Connector 119">
-            <a:extLst>
-              <a:ext uri="{FF2B5EF4-FFF2-40B4-BE49-F238E27FC236}">
-                <a16:creationId xmlns:a16="http://schemas.microsoft.com/office/drawing/2014/main" id="{1883FA79-CBE1-81F9-475F-742DC442633A}"/>
-              </a:ext>
-            </a:extLst>
-          </p:cNvPr>
-          <p:cNvCxnSpPr>
-            <a:cxnSpLocks/>
-          </p:cNvCxnSpPr>
-          <p:nvPr/>
-        </p:nvCxnSpPr>
-        <p:spPr>
-          <a:xfrm>
-            <a:off x="2763237" y="4519030"/>
-            <a:ext cx="0" cy="761538"/>
-          </a:xfrm>
-          <a:prstGeom prst="line">
-            <a:avLst/>
-          </a:prstGeom>
         </p:spPr>
         <p:style>
           <a:lnRef idx="2">
@@ -9577,205 +9945,16 @@
           <p:nvPr/>
         </p:nvCxnSpPr>
         <p:spPr>
-          <a:xfrm>
-            <a:off x="2981569" y="5160759"/>
-            <a:ext cx="211703" cy="0"/>
-          </a:xfrm>
-          <a:prstGeom prst="straightConnector1">
-            <a:avLst/>
-          </a:prstGeom>
-          <a:ln>
-            <a:tailEnd type="triangle"/>
-          </a:ln>
-        </p:spPr>
-        <p:style>
-          <a:lnRef idx="2">
-            <a:schemeClr val="accent1"/>
-          </a:lnRef>
-          <a:fillRef idx="0">
-            <a:schemeClr val="accent1"/>
-          </a:fillRef>
-          <a:effectRef idx="1">
-            <a:schemeClr val="accent1"/>
-          </a:effectRef>
-          <a:fontRef idx="minor">
-            <a:schemeClr val="tx1"/>
-          </a:fontRef>
-        </p:style>
-      </p:cxnSp>
-      <p:cxnSp>
-        <p:nvCxnSpPr>
-          <p:cNvPr id="122" name="Straight Connector 121">
-            <a:extLst>
-              <a:ext uri="{FF2B5EF4-FFF2-40B4-BE49-F238E27FC236}">
-                <a16:creationId xmlns:a16="http://schemas.microsoft.com/office/drawing/2014/main" id="{47FF72DD-5839-7297-77B0-F5EC466118C5}"/>
-              </a:ext>
-            </a:extLst>
-          </p:cNvPr>
-          <p:cNvCxnSpPr/>
-          <p:nvPr/>
-        </p:nvCxnSpPr>
-        <p:spPr>
-          <a:xfrm flipH="1" flipV="1">
-            <a:off x="2602523" y="4499564"/>
-            <a:ext cx="164123" cy="7703"/>
-          </a:xfrm>
-          <a:prstGeom prst="line">
-            <a:avLst/>
-          </a:prstGeom>
-        </p:spPr>
-        <p:style>
-          <a:lnRef idx="2">
-            <a:schemeClr val="accent1"/>
-          </a:lnRef>
-          <a:fillRef idx="0">
-            <a:schemeClr val="accent1"/>
-          </a:fillRef>
-          <a:effectRef idx="1">
-            <a:schemeClr val="accent1"/>
-          </a:effectRef>
-          <a:fontRef idx="minor">
-            <a:schemeClr val="tx1"/>
-          </a:fontRef>
-        </p:style>
-      </p:cxnSp>
-      <p:cxnSp>
-        <p:nvCxnSpPr>
-          <p:cNvPr id="123" name="Straight Connector 122">
-            <a:extLst>
-              <a:ext uri="{FF2B5EF4-FFF2-40B4-BE49-F238E27FC236}">
-                <a16:creationId xmlns:a16="http://schemas.microsoft.com/office/drawing/2014/main" id="{61CB085F-EFA5-81F0-171A-B0F01423DFC7}"/>
-              </a:ext>
-            </a:extLst>
-          </p:cNvPr>
-          <p:cNvCxnSpPr/>
-          <p:nvPr/>
-        </p:nvCxnSpPr>
-        <p:spPr>
-          <a:xfrm>
-            <a:off x="2989385" y="4912022"/>
-            <a:ext cx="0" cy="253947"/>
-          </a:xfrm>
-          <a:prstGeom prst="line">
-            <a:avLst/>
-          </a:prstGeom>
-        </p:spPr>
-        <p:style>
-          <a:lnRef idx="2">
-            <a:schemeClr val="accent1"/>
-          </a:lnRef>
-          <a:fillRef idx="0">
-            <a:schemeClr val="accent1"/>
-          </a:fillRef>
-          <a:effectRef idx="1">
-            <a:schemeClr val="accent1"/>
-          </a:effectRef>
-          <a:fontRef idx="minor">
-            <a:schemeClr val="tx1"/>
-          </a:fontRef>
-        </p:style>
-      </p:cxnSp>
-      <p:cxnSp>
-        <p:nvCxnSpPr>
-          <p:cNvPr id="124" name="Straight Connector 123">
-            <a:extLst>
-              <a:ext uri="{FF2B5EF4-FFF2-40B4-BE49-F238E27FC236}">
-                <a16:creationId xmlns:a16="http://schemas.microsoft.com/office/drawing/2014/main" id="{A7AA200C-FCA9-EE26-397A-A699E5A6646F}"/>
-              </a:ext>
-            </a:extLst>
-          </p:cNvPr>
-          <p:cNvCxnSpPr/>
-          <p:nvPr/>
-        </p:nvCxnSpPr>
-        <p:spPr>
-          <a:xfrm>
-            <a:off x="2985477" y="4912022"/>
-            <a:ext cx="2313354" cy="0"/>
-          </a:xfrm>
-          <a:prstGeom prst="line">
-            <a:avLst/>
-          </a:prstGeom>
-        </p:spPr>
-        <p:style>
-          <a:lnRef idx="2">
-            <a:schemeClr val="accent1"/>
-          </a:lnRef>
-          <a:fillRef idx="0">
-            <a:schemeClr val="accent1"/>
-          </a:fillRef>
-          <a:effectRef idx="1">
-            <a:schemeClr val="accent1"/>
-          </a:effectRef>
-          <a:fontRef idx="minor">
-            <a:schemeClr val="tx1"/>
-          </a:fontRef>
-        </p:style>
-      </p:cxnSp>
-      <p:cxnSp>
-        <p:nvCxnSpPr>
-          <p:cNvPr id="125" name="Straight Arrow Connector 124">
-            <a:extLst>
-              <a:ext uri="{FF2B5EF4-FFF2-40B4-BE49-F238E27FC236}">
-                <a16:creationId xmlns:a16="http://schemas.microsoft.com/office/drawing/2014/main" id="{EC42D385-1455-5F7D-5DE9-63C32D5B7E54}"/>
-              </a:ext>
-            </a:extLst>
-          </p:cNvPr>
-          <p:cNvCxnSpPr/>
-          <p:nvPr/>
-        </p:nvCxnSpPr>
-        <p:spPr>
           <a:xfrm flipV="1">
-            <a:off x="3977662" y="4996009"/>
-            <a:ext cx="0" cy="225402"/>
+            <a:off x="2639349" y="5160759"/>
+            <a:ext cx="553923" cy="1665"/>
           </a:xfrm>
           <a:prstGeom prst="straightConnector1">
             <a:avLst/>
           </a:prstGeom>
           <a:ln>
             <a:solidFill>
-              <a:srgbClr val="FF0000"/>
-            </a:solidFill>
-            <a:tailEnd type="triangle"/>
-          </a:ln>
-        </p:spPr>
-        <p:style>
-          <a:lnRef idx="2">
-            <a:schemeClr val="accent1"/>
-          </a:lnRef>
-          <a:fillRef idx="0">
-            <a:schemeClr val="accent1"/>
-          </a:fillRef>
-          <a:effectRef idx="1">
-            <a:schemeClr val="accent1"/>
-          </a:effectRef>
-          <a:fontRef idx="minor">
-            <a:schemeClr val="tx1"/>
-          </a:fontRef>
-        </p:style>
-      </p:cxnSp>
-      <p:cxnSp>
-        <p:nvCxnSpPr>
-          <p:cNvPr id="128" name="Straight Arrow Connector 127">
-            <a:extLst>
-              <a:ext uri="{FF2B5EF4-FFF2-40B4-BE49-F238E27FC236}">
-                <a16:creationId xmlns:a16="http://schemas.microsoft.com/office/drawing/2014/main" id="{2FF7584B-44F4-AC4F-1A2B-A5EEAC3183AF}"/>
-              </a:ext>
-            </a:extLst>
-          </p:cNvPr>
-          <p:cNvCxnSpPr/>
-          <p:nvPr/>
-        </p:nvCxnSpPr>
-        <p:spPr>
-          <a:xfrm>
-            <a:off x="4019628" y="5487290"/>
-            <a:ext cx="0" cy="200651"/>
-          </a:xfrm>
-          <a:prstGeom prst="straightConnector1">
-            <a:avLst/>
-          </a:prstGeom>
-          <a:ln>
-            <a:solidFill>
-              <a:srgbClr val="FF0000"/>
+              <a:srgbClr val="7030A0"/>
             </a:solidFill>
             <a:tailEnd type="triangle"/>
           </a:ln>
@@ -10817,14 +10996,14 @@
         <p:spPr>
           <a:xfrm flipV="1">
             <a:off x="9432653" y="4931909"/>
-            <a:ext cx="0" cy="318976"/>
+            <a:ext cx="0" cy="641437"/>
           </a:xfrm>
           <a:prstGeom prst="straightConnector1">
             <a:avLst/>
           </a:prstGeom>
           <a:ln>
             <a:solidFill>
-              <a:srgbClr val="FF0000"/>
+              <a:srgbClr val="7030A0"/>
             </a:solidFill>
             <a:tailEnd type="triangle"/>
           </a:ln>
@@ -10860,12 +11039,17 @@
         </p:nvCxnSpPr>
         <p:spPr>
           <a:xfrm flipH="1">
-            <a:off x="9388685" y="5117831"/>
-            <a:ext cx="85431" cy="62194"/>
+            <a:off x="7445956" y="5249726"/>
+            <a:ext cx="1996145" cy="0"/>
           </a:xfrm>
           <a:prstGeom prst="line">
             <a:avLst/>
           </a:prstGeom>
+          <a:ln>
+            <a:solidFill>
+              <a:srgbClr val="7030A0"/>
+            </a:solidFill>
+          </a:ln>
         </p:spPr>
         <p:style>
           <a:lnRef idx="2">
@@ -10905,6 +11089,9 @@
             <a:avLst/>
           </a:prstGeom>
           <a:ln>
+            <a:solidFill>
+              <a:srgbClr val="7030A0"/>
+            </a:solidFill>
             <a:tailEnd type="triangle"/>
           </a:ln>
         </p:spPr>
@@ -10923,42 +11110,6 @@
           </a:fontRef>
         </p:style>
       </p:cxnSp>
-      <p:sp>
-        <p:nvSpPr>
-          <p:cNvPr id="174" name="TextBox 173">
-            <a:extLst>
-              <a:ext uri="{FF2B5EF4-FFF2-40B4-BE49-F238E27FC236}">
-                <a16:creationId xmlns:a16="http://schemas.microsoft.com/office/drawing/2014/main" id="{7519AAD8-ECD9-BCFB-E19F-03D8220E44C3}"/>
-              </a:ext>
-            </a:extLst>
-          </p:cNvPr>
-          <p:cNvSpPr txBox="1"/>
-          <p:nvPr/>
-        </p:nvSpPr>
-        <p:spPr>
-          <a:xfrm>
-            <a:off x="9014468" y="3198168"/>
-            <a:ext cx="474810" cy="230832"/>
-          </a:xfrm>
-          <a:prstGeom prst="rect">
-            <a:avLst/>
-          </a:prstGeom>
-          <a:noFill/>
-        </p:spPr>
-        <p:txBody>
-          <a:bodyPr wrap="none" rtlCol="0">
-            <a:spAutoFit/>
-          </a:bodyPr>
-          <a:lstStyle/>
-          <a:p>
-            <a:pPr algn="ctr"/>
-            <a:r>
-              <a:rPr lang="en-US" sz="900" dirty="0"/>
-              <a:t>dout1</a:t>
-            </a:r>
-          </a:p>
-        </p:txBody>
-      </p:sp>
       <p:cxnSp>
         <p:nvCxnSpPr>
           <p:cNvPr id="184" name="Straight Arrow Connector 183">
@@ -10983,7 +11134,7 @@
           </a:prstGeom>
           <a:ln>
             <a:solidFill>
-              <a:srgbClr val="FF0000"/>
+              <a:srgbClr val="7030A0"/>
             </a:solidFill>
             <a:tailEnd type="triangle"/>
           </a:ln>
@@ -11107,13 +11258,16 @@
         </p:nvCxnSpPr>
         <p:spPr>
           <a:xfrm>
-            <a:off x="9601800" y="3367023"/>
-            <a:ext cx="0" cy="137890"/>
+            <a:off x="9601800" y="3193986"/>
+            <a:ext cx="0" cy="310927"/>
           </a:xfrm>
           <a:prstGeom prst="straightConnector1">
             <a:avLst/>
           </a:prstGeom>
           <a:ln>
+            <a:solidFill>
+              <a:srgbClr val="7030A0"/>
+            </a:solidFill>
             <a:tailEnd type="triangle"/>
           </a:ln>
         </p:spPr>
@@ -11148,15 +11302,15 @@
         </p:nvCxnSpPr>
         <p:spPr>
           <a:xfrm flipV="1">
-            <a:off x="10822834" y="3193477"/>
-            <a:ext cx="0" cy="616523"/>
+            <a:off x="10849629" y="3174177"/>
+            <a:ext cx="0" cy="135225"/>
           </a:xfrm>
           <a:prstGeom prst="straightConnector1">
             <a:avLst/>
           </a:prstGeom>
           <a:ln>
             <a:solidFill>
-              <a:srgbClr val="FF0000"/>
+              <a:srgbClr val="7030A0"/>
             </a:solidFill>
             <a:tailEnd type="triangle"/>
           </a:ln>
@@ -11192,12 +11346,17 @@
         </p:nvCxnSpPr>
         <p:spPr>
           <a:xfrm flipH="1">
-            <a:off x="10772078" y="3608496"/>
-            <a:ext cx="107051" cy="69157"/>
+            <a:off x="9981362" y="3412968"/>
+            <a:ext cx="1192405" cy="0"/>
           </a:xfrm>
           <a:prstGeom prst="line">
             <a:avLst/>
           </a:prstGeom>
+          <a:ln>
+            <a:solidFill>
+              <a:srgbClr val="7030A0"/>
+            </a:solidFill>
+          </a:ln>
         </p:spPr>
         <p:style>
           <a:lnRef idx="2">
@@ -11214,12 +11373,443 @@
           </a:fontRef>
         </p:style>
       </p:cxnSp>
-      <p:sp>
-        <p:nvSpPr>
-          <p:cNvPr id="17" name="TextBox 16">
-            <a:extLst>
-              <a:ext uri="{FF2B5EF4-FFF2-40B4-BE49-F238E27FC236}">
-                <a16:creationId xmlns:a16="http://schemas.microsoft.com/office/drawing/2014/main" id="{F3C357C1-6CA0-FE49-1679-B84ECC79460C}"/>
+      <p:cxnSp>
+        <p:nvCxnSpPr>
+          <p:cNvPr id="26" name="Straight Arrow Connector 25">
+            <a:extLst>
+              <a:ext uri="{FF2B5EF4-FFF2-40B4-BE49-F238E27FC236}">
+                <a16:creationId xmlns:a16="http://schemas.microsoft.com/office/drawing/2014/main" id="{F93FF150-8370-FB86-5E5C-59855FA6B568}"/>
+              </a:ext>
+            </a:extLst>
+          </p:cNvPr>
+          <p:cNvCxnSpPr>
+            <a:cxnSpLocks/>
+          </p:cNvCxnSpPr>
+          <p:nvPr/>
+        </p:nvCxnSpPr>
+        <p:spPr>
+          <a:xfrm flipV="1">
+            <a:off x="8718196" y="2434882"/>
+            <a:ext cx="0" cy="398505"/>
+          </a:xfrm>
+          <a:prstGeom prst="straightConnector1">
+            <a:avLst/>
+          </a:prstGeom>
+          <a:ln>
+            <a:solidFill>
+              <a:srgbClr val="7030A0"/>
+            </a:solidFill>
+            <a:tailEnd type="triangle"/>
+          </a:ln>
+        </p:spPr>
+        <p:style>
+          <a:lnRef idx="2">
+            <a:schemeClr val="accent1"/>
+          </a:lnRef>
+          <a:fillRef idx="0">
+            <a:schemeClr val="accent1"/>
+          </a:fillRef>
+          <a:effectRef idx="1">
+            <a:schemeClr val="accent1"/>
+          </a:effectRef>
+          <a:fontRef idx="minor">
+            <a:schemeClr val="tx1"/>
+          </a:fontRef>
+        </p:style>
+      </p:cxnSp>
+      <p:cxnSp>
+        <p:nvCxnSpPr>
+          <p:cNvPr id="225" name="Straight Connector 224">
+            <a:extLst>
+              <a:ext uri="{FF2B5EF4-FFF2-40B4-BE49-F238E27FC236}">
+                <a16:creationId xmlns:a16="http://schemas.microsoft.com/office/drawing/2014/main" id="{9AD12D2F-0B82-940F-A9A0-1864AFEAE547}"/>
+              </a:ext>
+            </a:extLst>
+          </p:cNvPr>
+          <p:cNvCxnSpPr>
+            <a:cxnSpLocks/>
+          </p:cNvCxnSpPr>
+          <p:nvPr/>
+        </p:nvCxnSpPr>
+        <p:spPr>
+          <a:xfrm>
+            <a:off x="1852163" y="3945542"/>
+            <a:ext cx="0" cy="966480"/>
+          </a:xfrm>
+          <a:prstGeom prst="line">
+            <a:avLst/>
+          </a:prstGeom>
+          <a:ln>
+            <a:solidFill>
+              <a:srgbClr val="7030A0"/>
+            </a:solidFill>
+          </a:ln>
+        </p:spPr>
+        <p:style>
+          <a:lnRef idx="2">
+            <a:schemeClr val="accent1"/>
+          </a:lnRef>
+          <a:fillRef idx="0">
+            <a:schemeClr val="accent1"/>
+          </a:fillRef>
+          <a:effectRef idx="1">
+            <a:schemeClr val="accent1"/>
+          </a:effectRef>
+          <a:fontRef idx="minor">
+            <a:schemeClr val="tx1"/>
+          </a:fontRef>
+        </p:style>
+      </p:cxnSp>
+      <p:cxnSp>
+        <p:nvCxnSpPr>
+          <p:cNvPr id="232" name="Straight Connector 231">
+            <a:extLst>
+              <a:ext uri="{FF2B5EF4-FFF2-40B4-BE49-F238E27FC236}">
+                <a16:creationId xmlns:a16="http://schemas.microsoft.com/office/drawing/2014/main" id="{FCD12DB1-FCE3-D025-9675-63CE92225D4D}"/>
+              </a:ext>
+            </a:extLst>
+          </p:cNvPr>
+          <p:cNvCxnSpPr>
+            <a:cxnSpLocks/>
+          </p:cNvCxnSpPr>
+          <p:nvPr/>
+        </p:nvCxnSpPr>
+        <p:spPr>
+          <a:xfrm>
+            <a:off x="1603923" y="4513570"/>
+            <a:ext cx="238807" cy="10920"/>
+          </a:xfrm>
+          <a:prstGeom prst="line">
+            <a:avLst/>
+          </a:prstGeom>
+          <a:ln>
+            <a:solidFill>
+              <a:srgbClr val="7030A0"/>
+            </a:solidFill>
+          </a:ln>
+        </p:spPr>
+        <p:style>
+          <a:lnRef idx="2">
+            <a:schemeClr val="accent1"/>
+          </a:lnRef>
+          <a:fillRef idx="0">
+            <a:schemeClr val="accent1"/>
+          </a:fillRef>
+          <a:effectRef idx="1">
+            <a:schemeClr val="accent1"/>
+          </a:effectRef>
+          <a:fontRef idx="minor">
+            <a:schemeClr val="tx1"/>
+          </a:fontRef>
+        </p:style>
+      </p:cxnSp>
+      <p:cxnSp>
+        <p:nvCxnSpPr>
+          <p:cNvPr id="233" name="Straight Connector 232">
+            <a:extLst>
+              <a:ext uri="{FF2B5EF4-FFF2-40B4-BE49-F238E27FC236}">
+                <a16:creationId xmlns:a16="http://schemas.microsoft.com/office/drawing/2014/main" id="{BD07FDF8-8C4A-F3FC-ED2E-873C7E9461DB}"/>
+              </a:ext>
+            </a:extLst>
+          </p:cNvPr>
+          <p:cNvCxnSpPr>
+            <a:cxnSpLocks/>
+          </p:cNvCxnSpPr>
+          <p:nvPr/>
+        </p:nvCxnSpPr>
+        <p:spPr>
+          <a:xfrm>
+            <a:off x="1849010" y="3947295"/>
+            <a:ext cx="119404" cy="0"/>
+          </a:xfrm>
+          <a:prstGeom prst="line">
+            <a:avLst/>
+          </a:prstGeom>
+          <a:ln>
+            <a:solidFill>
+              <a:srgbClr val="7030A0"/>
+            </a:solidFill>
+          </a:ln>
+        </p:spPr>
+        <p:style>
+          <a:lnRef idx="2">
+            <a:schemeClr val="accent1"/>
+          </a:lnRef>
+          <a:fillRef idx="0">
+            <a:schemeClr val="accent1"/>
+          </a:fillRef>
+          <a:effectRef idx="1">
+            <a:schemeClr val="accent1"/>
+          </a:effectRef>
+          <a:fontRef idx="minor">
+            <a:schemeClr val="tx1"/>
+          </a:fontRef>
+        </p:style>
+      </p:cxnSp>
+      <p:cxnSp>
+        <p:nvCxnSpPr>
+          <p:cNvPr id="237" name="Straight Connector 236">
+            <a:extLst>
+              <a:ext uri="{FF2B5EF4-FFF2-40B4-BE49-F238E27FC236}">
+                <a16:creationId xmlns:a16="http://schemas.microsoft.com/office/drawing/2014/main" id="{236A583A-25CC-4749-5F35-D32CCBB32044}"/>
+              </a:ext>
+            </a:extLst>
+          </p:cNvPr>
+          <p:cNvCxnSpPr>
+            <a:cxnSpLocks/>
+          </p:cNvCxnSpPr>
+          <p:nvPr/>
+        </p:nvCxnSpPr>
+        <p:spPr>
+          <a:xfrm>
+            <a:off x="1852163" y="4099832"/>
+            <a:ext cx="119404" cy="0"/>
+          </a:xfrm>
+          <a:prstGeom prst="line">
+            <a:avLst/>
+          </a:prstGeom>
+          <a:ln>
+            <a:solidFill>
+              <a:srgbClr val="7030A0"/>
+            </a:solidFill>
+          </a:ln>
+        </p:spPr>
+        <p:style>
+          <a:lnRef idx="2">
+            <a:schemeClr val="accent1"/>
+          </a:lnRef>
+          <a:fillRef idx="0">
+            <a:schemeClr val="accent1"/>
+          </a:fillRef>
+          <a:effectRef idx="1">
+            <a:schemeClr val="accent1"/>
+          </a:effectRef>
+          <a:fontRef idx="minor">
+            <a:schemeClr val="tx1"/>
+          </a:fontRef>
+        </p:style>
+      </p:cxnSp>
+      <p:cxnSp>
+        <p:nvCxnSpPr>
+          <p:cNvPr id="241" name="Straight Connector 240">
+            <a:extLst>
+              <a:ext uri="{FF2B5EF4-FFF2-40B4-BE49-F238E27FC236}">
+                <a16:creationId xmlns:a16="http://schemas.microsoft.com/office/drawing/2014/main" id="{9C153D9A-939D-DDC5-28F6-F9B2A6ED3C1A}"/>
+              </a:ext>
+            </a:extLst>
+          </p:cNvPr>
+          <p:cNvCxnSpPr>
+            <a:cxnSpLocks/>
+          </p:cNvCxnSpPr>
+          <p:nvPr/>
+        </p:nvCxnSpPr>
+        <p:spPr>
+          <a:xfrm>
+            <a:off x="1852163" y="4409541"/>
+            <a:ext cx="119404" cy="0"/>
+          </a:xfrm>
+          <a:prstGeom prst="line">
+            <a:avLst/>
+          </a:prstGeom>
+          <a:ln>
+            <a:solidFill>
+              <a:srgbClr val="7030A0"/>
+            </a:solidFill>
+          </a:ln>
+        </p:spPr>
+        <p:style>
+          <a:lnRef idx="2">
+            <a:schemeClr val="accent1"/>
+          </a:lnRef>
+          <a:fillRef idx="0">
+            <a:schemeClr val="accent1"/>
+          </a:fillRef>
+          <a:effectRef idx="1">
+            <a:schemeClr val="accent1"/>
+          </a:effectRef>
+          <a:fontRef idx="minor">
+            <a:schemeClr val="tx1"/>
+          </a:fontRef>
+        </p:style>
+      </p:cxnSp>
+      <p:cxnSp>
+        <p:nvCxnSpPr>
+          <p:cNvPr id="242" name="Straight Connector 241">
+            <a:extLst>
+              <a:ext uri="{FF2B5EF4-FFF2-40B4-BE49-F238E27FC236}">
+                <a16:creationId xmlns:a16="http://schemas.microsoft.com/office/drawing/2014/main" id="{776997D0-182B-D8B3-8AF5-2B2188817DEE}"/>
+              </a:ext>
+            </a:extLst>
+          </p:cNvPr>
+          <p:cNvCxnSpPr>
+            <a:cxnSpLocks/>
+          </p:cNvCxnSpPr>
+          <p:nvPr/>
+        </p:nvCxnSpPr>
+        <p:spPr>
+          <a:xfrm>
+            <a:off x="1852163" y="4895908"/>
+            <a:ext cx="119404" cy="0"/>
+          </a:xfrm>
+          <a:prstGeom prst="line">
+            <a:avLst/>
+          </a:prstGeom>
+          <a:ln>
+            <a:solidFill>
+              <a:srgbClr val="7030A0"/>
+            </a:solidFill>
+          </a:ln>
+        </p:spPr>
+        <p:style>
+          <a:lnRef idx="2">
+            <a:schemeClr val="accent1"/>
+          </a:lnRef>
+          <a:fillRef idx="0">
+            <a:schemeClr val="accent1"/>
+          </a:fillRef>
+          <a:effectRef idx="1">
+            <a:schemeClr val="accent1"/>
+          </a:effectRef>
+          <a:fontRef idx="minor">
+            <a:schemeClr val="tx1"/>
+          </a:fontRef>
+        </p:style>
+      </p:cxnSp>
+      <p:cxnSp>
+        <p:nvCxnSpPr>
+          <p:cNvPr id="244" name="Straight Connector 243">
+            <a:extLst>
+              <a:ext uri="{FF2B5EF4-FFF2-40B4-BE49-F238E27FC236}">
+                <a16:creationId xmlns:a16="http://schemas.microsoft.com/office/drawing/2014/main" id="{66EDE48A-0E21-1AE4-80CC-22BF6BB02141}"/>
+              </a:ext>
+            </a:extLst>
+          </p:cNvPr>
+          <p:cNvCxnSpPr>
+            <a:cxnSpLocks/>
+          </p:cNvCxnSpPr>
+          <p:nvPr/>
+        </p:nvCxnSpPr>
+        <p:spPr>
+          <a:xfrm>
+            <a:off x="1852163" y="4233266"/>
+            <a:ext cx="119404" cy="0"/>
+          </a:xfrm>
+          <a:prstGeom prst="line">
+            <a:avLst/>
+          </a:prstGeom>
+          <a:ln>
+            <a:solidFill>
+              <a:srgbClr val="7030A0"/>
+            </a:solidFill>
+          </a:ln>
+        </p:spPr>
+        <p:style>
+          <a:lnRef idx="2">
+            <a:schemeClr val="accent1"/>
+          </a:lnRef>
+          <a:fillRef idx="0">
+            <a:schemeClr val="accent1"/>
+          </a:fillRef>
+          <a:effectRef idx="1">
+            <a:schemeClr val="accent1"/>
+          </a:effectRef>
+          <a:fontRef idx="minor">
+            <a:schemeClr val="tx1"/>
+          </a:fontRef>
+        </p:style>
+      </p:cxnSp>
+      <p:cxnSp>
+        <p:nvCxnSpPr>
+          <p:cNvPr id="245" name="Straight Connector 244">
+            <a:extLst>
+              <a:ext uri="{FF2B5EF4-FFF2-40B4-BE49-F238E27FC236}">
+                <a16:creationId xmlns:a16="http://schemas.microsoft.com/office/drawing/2014/main" id="{500C58B6-ABF9-5447-4931-F3274FC8E844}"/>
+              </a:ext>
+            </a:extLst>
+          </p:cNvPr>
+          <p:cNvCxnSpPr>
+            <a:cxnSpLocks/>
+          </p:cNvCxnSpPr>
+          <p:nvPr/>
+        </p:nvCxnSpPr>
+        <p:spPr>
+          <a:xfrm>
+            <a:off x="1852163" y="4574579"/>
+            <a:ext cx="119404" cy="0"/>
+          </a:xfrm>
+          <a:prstGeom prst="line">
+            <a:avLst/>
+          </a:prstGeom>
+          <a:ln>
+            <a:solidFill>
+              <a:srgbClr val="7030A0"/>
+            </a:solidFill>
+          </a:ln>
+        </p:spPr>
+        <p:style>
+          <a:lnRef idx="2">
+            <a:schemeClr val="accent1"/>
+          </a:lnRef>
+          <a:fillRef idx="0">
+            <a:schemeClr val="accent1"/>
+          </a:fillRef>
+          <a:effectRef idx="1">
+            <a:schemeClr val="accent1"/>
+          </a:effectRef>
+          <a:fontRef idx="minor">
+            <a:schemeClr val="tx1"/>
+          </a:fontRef>
+        </p:style>
+      </p:cxnSp>
+      <p:cxnSp>
+        <p:nvCxnSpPr>
+          <p:cNvPr id="246" name="Straight Connector 245">
+            <a:extLst>
+              <a:ext uri="{FF2B5EF4-FFF2-40B4-BE49-F238E27FC236}">
+                <a16:creationId xmlns:a16="http://schemas.microsoft.com/office/drawing/2014/main" id="{56B7E068-87F8-FA7D-8DB1-00C3F3E707E1}"/>
+              </a:ext>
+            </a:extLst>
+          </p:cNvPr>
+          <p:cNvCxnSpPr>
+            <a:cxnSpLocks/>
+          </p:cNvCxnSpPr>
+          <p:nvPr/>
+        </p:nvCxnSpPr>
+        <p:spPr>
+          <a:xfrm>
+            <a:off x="1852163" y="4723607"/>
+            <a:ext cx="119404" cy="0"/>
+          </a:xfrm>
+          <a:prstGeom prst="line">
+            <a:avLst/>
+          </a:prstGeom>
+          <a:ln>
+            <a:solidFill>
+              <a:srgbClr val="7030A0"/>
+            </a:solidFill>
+          </a:ln>
+        </p:spPr>
+        <p:style>
+          <a:lnRef idx="2">
+            <a:schemeClr val="accent1"/>
+          </a:lnRef>
+          <a:fillRef idx="0">
+            <a:schemeClr val="accent1"/>
+          </a:fillRef>
+          <a:effectRef idx="1">
+            <a:schemeClr val="accent1"/>
+          </a:effectRef>
+          <a:fontRef idx="minor">
+            <a:schemeClr val="tx1"/>
+          </a:fontRef>
+        </p:style>
+      </p:cxnSp>
+      <p:sp>
+        <p:nvSpPr>
+          <p:cNvPr id="247" name="TextBox 246">
+            <a:extLst>
+              <a:ext uri="{FF2B5EF4-FFF2-40B4-BE49-F238E27FC236}">
+                <a16:creationId xmlns:a16="http://schemas.microsoft.com/office/drawing/2014/main" id="{96B7F4CB-2978-21C1-3756-54AE300A5B2A}"/>
               </a:ext>
             </a:extLst>
           </p:cNvPr>
@@ -11228,8 +11818,8 @@
         </p:nvSpPr>
         <p:spPr>
           <a:xfrm>
-            <a:off x="9370905" y="3184375"/>
-            <a:ext cx="474810" cy="230832"/>
+            <a:off x="1908693" y="3820410"/>
+            <a:ext cx="639919" cy="230832"/>
           </a:xfrm>
           <a:prstGeom prst="rect">
             <a:avLst/>
@@ -11244,18 +11834,287 @@
           <a:p>
             <a:pPr algn="ctr"/>
             <a:r>
-              <a:rPr lang="en-US" sz="900" dirty="0"/>
-              <a:t>dout2</a:t>
+              <a:rPr lang="en-US" sz="900" dirty="0" err="1">
+                <a:solidFill>
+                  <a:srgbClr val="7030A0"/>
+                </a:solidFill>
+              </a:rPr>
+              <a:t>reg_write</a:t>
+            </a:r>
+            <a:endParaRPr lang="en-US" sz="900" dirty="0">
+              <a:solidFill>
+                <a:srgbClr val="7030A0"/>
+              </a:solidFill>
+            </a:endParaRPr>
+          </a:p>
+        </p:txBody>
+      </p:sp>
+      <p:sp>
+        <p:nvSpPr>
+          <p:cNvPr id="248" name="TextBox 247">
+            <a:extLst>
+              <a:ext uri="{FF2B5EF4-FFF2-40B4-BE49-F238E27FC236}">
+                <a16:creationId xmlns:a16="http://schemas.microsoft.com/office/drawing/2014/main" id="{28E1B415-6889-3533-0BAB-BF79543B7564}"/>
+              </a:ext>
+            </a:extLst>
+          </p:cNvPr>
+          <p:cNvSpPr txBox="1"/>
+          <p:nvPr/>
+        </p:nvSpPr>
+        <p:spPr>
+          <a:xfrm>
+            <a:off x="1892663" y="3963371"/>
+            <a:ext cx="718466" cy="230832"/>
+          </a:xfrm>
+          <a:prstGeom prst="rect">
+            <a:avLst/>
+          </a:prstGeom>
+          <a:noFill/>
+        </p:spPr>
+        <p:txBody>
+          <a:bodyPr wrap="none" rtlCol="0">
+            <a:spAutoFit/>
+          </a:bodyPr>
+          <a:lstStyle/>
+          <a:p>
+            <a:pPr algn="ctr"/>
+            <a:r>
+              <a:rPr lang="en-US" sz="900" dirty="0" err="1">
+                <a:solidFill>
+                  <a:srgbClr val="7030A0"/>
+                </a:solidFill>
+              </a:rPr>
+              <a:t>mem_read</a:t>
+            </a:r>
+            <a:endParaRPr lang="en-US" sz="900" dirty="0">
+              <a:solidFill>
+                <a:srgbClr val="7030A0"/>
+              </a:solidFill>
+            </a:endParaRPr>
+          </a:p>
+        </p:txBody>
+      </p:sp>
+      <p:sp>
+        <p:nvSpPr>
+          <p:cNvPr id="249" name="TextBox 248">
+            <a:extLst>
+              <a:ext uri="{FF2B5EF4-FFF2-40B4-BE49-F238E27FC236}">
+                <a16:creationId xmlns:a16="http://schemas.microsoft.com/office/drawing/2014/main" id="{7ACC1344-F1C8-5BF1-D5FB-6581A8EC25D2}"/>
+              </a:ext>
+            </a:extLst>
+          </p:cNvPr>
+          <p:cNvSpPr txBox="1"/>
+          <p:nvPr/>
+        </p:nvSpPr>
+        <p:spPr>
+          <a:xfrm>
+            <a:off x="1898440" y="4116562"/>
+            <a:ext cx="740908" cy="230832"/>
+          </a:xfrm>
+          <a:prstGeom prst="rect">
+            <a:avLst/>
+          </a:prstGeom>
+          <a:noFill/>
+        </p:spPr>
+        <p:txBody>
+          <a:bodyPr wrap="none" rtlCol="0">
+            <a:spAutoFit/>
+          </a:bodyPr>
+          <a:lstStyle/>
+          <a:p>
+            <a:pPr algn="ctr"/>
+            <a:r>
+              <a:rPr lang="en-US" sz="900" dirty="0" err="1">
+                <a:solidFill>
+                  <a:srgbClr val="7030A0"/>
+                </a:solidFill>
+              </a:rPr>
+              <a:t>mem_write</a:t>
+            </a:r>
+            <a:endParaRPr lang="en-US" sz="900" dirty="0">
+              <a:solidFill>
+                <a:srgbClr val="7030A0"/>
+              </a:solidFill>
+            </a:endParaRPr>
+          </a:p>
+        </p:txBody>
+      </p:sp>
+      <p:sp>
+        <p:nvSpPr>
+          <p:cNvPr id="250" name="TextBox 249">
+            <a:extLst>
+              <a:ext uri="{FF2B5EF4-FFF2-40B4-BE49-F238E27FC236}">
+                <a16:creationId xmlns:a16="http://schemas.microsoft.com/office/drawing/2014/main" id="{6F0663C8-D33B-AB21-AF3B-D27B0D8E6E98}"/>
+              </a:ext>
+            </a:extLst>
+          </p:cNvPr>
+          <p:cNvSpPr txBox="1"/>
+          <p:nvPr/>
+        </p:nvSpPr>
+        <p:spPr>
+          <a:xfrm>
+            <a:off x="1904769" y="4278598"/>
+            <a:ext cx="548548" cy="230832"/>
+          </a:xfrm>
+          <a:prstGeom prst="rect">
+            <a:avLst/>
+          </a:prstGeom>
+          <a:noFill/>
+        </p:spPr>
+        <p:txBody>
+          <a:bodyPr wrap="none" rtlCol="0">
+            <a:spAutoFit/>
+          </a:bodyPr>
+          <a:lstStyle/>
+          <a:p>
+            <a:pPr algn="ctr"/>
+            <a:r>
+              <a:rPr lang="en-US" sz="900" dirty="0" err="1">
+                <a:solidFill>
+                  <a:srgbClr val="7030A0"/>
+                </a:solidFill>
+              </a:rPr>
+              <a:t>alu_src</a:t>
+            </a:r>
+            <a:endParaRPr lang="en-US" sz="900" dirty="0">
+              <a:solidFill>
+                <a:srgbClr val="7030A0"/>
+              </a:solidFill>
+            </a:endParaRPr>
+          </a:p>
+        </p:txBody>
+      </p:sp>
+      <p:sp>
+        <p:nvSpPr>
+          <p:cNvPr id="251" name="TextBox 250">
+            <a:extLst>
+              <a:ext uri="{FF2B5EF4-FFF2-40B4-BE49-F238E27FC236}">
+                <a16:creationId xmlns:a16="http://schemas.microsoft.com/office/drawing/2014/main" id="{A38CF1AD-8C72-B6DA-D1C2-AC9D430F8C90}"/>
+              </a:ext>
+            </a:extLst>
+          </p:cNvPr>
+          <p:cNvSpPr txBox="1"/>
+          <p:nvPr/>
+        </p:nvSpPr>
+        <p:spPr>
+          <a:xfrm>
+            <a:off x="1899624" y="4448177"/>
+            <a:ext cx="537327" cy="230832"/>
+          </a:xfrm>
+          <a:prstGeom prst="rect">
+            <a:avLst/>
+          </a:prstGeom>
+          <a:noFill/>
+        </p:spPr>
+        <p:txBody>
+          <a:bodyPr wrap="none" rtlCol="0">
+            <a:spAutoFit/>
+          </a:bodyPr>
+          <a:lstStyle/>
+          <a:p>
+            <a:pPr algn="ctr"/>
+            <a:r>
+              <a:rPr lang="en-US" sz="900" dirty="0">
+                <a:solidFill>
+                  <a:srgbClr val="7030A0"/>
+                </a:solidFill>
+              </a:rPr>
+              <a:t>branch</a:t>
+            </a:r>
+          </a:p>
+        </p:txBody>
+      </p:sp>
+      <p:sp>
+        <p:nvSpPr>
+          <p:cNvPr id="252" name="TextBox 251">
+            <a:extLst>
+              <a:ext uri="{FF2B5EF4-FFF2-40B4-BE49-F238E27FC236}">
+                <a16:creationId xmlns:a16="http://schemas.microsoft.com/office/drawing/2014/main" id="{F835948E-432D-3A37-E99C-2B84A1EF9AA6}"/>
+              </a:ext>
+            </a:extLst>
+          </p:cNvPr>
+          <p:cNvSpPr txBox="1"/>
+          <p:nvPr/>
+        </p:nvSpPr>
+        <p:spPr>
+          <a:xfrm>
+            <a:off x="1890641" y="4604120"/>
+            <a:ext cx="684803" cy="230832"/>
+          </a:xfrm>
+          <a:prstGeom prst="rect">
+            <a:avLst/>
+          </a:prstGeom>
+          <a:noFill/>
+        </p:spPr>
+        <p:txBody>
+          <a:bodyPr wrap="none" rtlCol="0">
+            <a:spAutoFit/>
+          </a:bodyPr>
+          <a:lstStyle/>
+          <a:p>
+            <a:pPr algn="ctr"/>
+            <a:r>
+              <a:rPr lang="en-US" sz="900" dirty="0" err="1">
+                <a:solidFill>
+                  <a:srgbClr val="7030A0"/>
+                </a:solidFill>
+              </a:rPr>
+              <a:t>load_addr</a:t>
+            </a:r>
+            <a:endParaRPr lang="en-US" sz="900" dirty="0">
+              <a:solidFill>
+                <a:srgbClr val="7030A0"/>
+              </a:solidFill>
+            </a:endParaRPr>
+          </a:p>
+        </p:txBody>
+      </p:sp>
+      <p:sp>
+        <p:nvSpPr>
+          <p:cNvPr id="253" name="TextBox 252">
+            <a:extLst>
+              <a:ext uri="{FF2B5EF4-FFF2-40B4-BE49-F238E27FC236}">
+                <a16:creationId xmlns:a16="http://schemas.microsoft.com/office/drawing/2014/main" id="{96A56E85-6E30-A024-04E9-6DBF34E8E925}"/>
+              </a:ext>
+            </a:extLst>
+          </p:cNvPr>
+          <p:cNvSpPr txBox="1"/>
+          <p:nvPr/>
+        </p:nvSpPr>
+        <p:spPr>
+          <a:xfrm>
+            <a:off x="1895012" y="4754834"/>
+            <a:ext cx="437941" cy="230832"/>
+          </a:xfrm>
+          <a:prstGeom prst="rect">
+            <a:avLst/>
+          </a:prstGeom>
+          <a:noFill/>
+        </p:spPr>
+        <p:txBody>
+          <a:bodyPr wrap="none" rtlCol="0">
+            <a:spAutoFit/>
+          </a:bodyPr>
+          <a:lstStyle/>
+          <a:p>
+            <a:pPr algn="ctr"/>
+            <a:r>
+              <a:rPr lang="en-US" sz="900" dirty="0">
+                <a:solidFill>
+                  <a:srgbClr val="7030A0"/>
+                </a:solidFill>
+              </a:rPr>
+              <a:t>jump</a:t>
             </a:r>
           </a:p>
         </p:txBody>
       </p:sp>
       <p:cxnSp>
         <p:nvCxnSpPr>
-          <p:cNvPr id="26" name="Straight Arrow Connector 25">
-            <a:extLst>
-              <a:ext uri="{FF2B5EF4-FFF2-40B4-BE49-F238E27FC236}">
-                <a16:creationId xmlns:a16="http://schemas.microsoft.com/office/drawing/2014/main" id="{F93FF150-8370-FB86-5E5C-59855FA6B568}"/>
+          <p:cNvPr id="255" name="Straight Connector 254">
+            <a:extLst>
+              <a:ext uri="{FF2B5EF4-FFF2-40B4-BE49-F238E27FC236}">
+                <a16:creationId xmlns:a16="http://schemas.microsoft.com/office/drawing/2014/main" id="{9A464231-8CE7-7ADC-8A63-3E6F1EC11B5A}"/>
               </a:ext>
             </a:extLst>
           </p:cNvPr>
@@ -11263,9 +12122,2014 @@
           <p:nvPr/>
         </p:nvCxnSpPr>
         <p:spPr>
+          <a:xfrm>
+            <a:off x="2162694" y="5383939"/>
+            <a:ext cx="157885" cy="0"/>
+          </a:xfrm>
+          <a:prstGeom prst="line">
+            <a:avLst/>
+          </a:prstGeom>
+          <a:ln>
+            <a:solidFill>
+              <a:srgbClr val="7030A0"/>
+            </a:solidFill>
+          </a:ln>
+        </p:spPr>
+        <p:style>
+          <a:lnRef idx="2">
+            <a:schemeClr val="accent1"/>
+          </a:lnRef>
+          <a:fillRef idx="0">
+            <a:schemeClr val="accent1"/>
+          </a:fillRef>
+          <a:effectRef idx="1">
+            <a:schemeClr val="accent1"/>
+          </a:effectRef>
+          <a:fontRef idx="minor">
+            <a:schemeClr val="tx1"/>
+          </a:fontRef>
+        </p:style>
+      </p:cxnSp>
+      <p:cxnSp>
+        <p:nvCxnSpPr>
+          <p:cNvPr id="37" name="Straight Connector 36">
+            <a:extLst>
+              <a:ext uri="{FF2B5EF4-FFF2-40B4-BE49-F238E27FC236}">
+                <a16:creationId xmlns:a16="http://schemas.microsoft.com/office/drawing/2014/main" id="{142C79A3-9D7B-4125-3FC4-4FAD12E6B027}"/>
+              </a:ext>
+            </a:extLst>
+          </p:cNvPr>
+          <p:cNvCxnSpPr>
+            <a:cxnSpLocks/>
+          </p:cNvCxnSpPr>
+          <p:nvPr/>
+        </p:nvCxnSpPr>
+        <p:spPr>
           <a:xfrm flipV="1">
-            <a:off x="8718196" y="2434882"/>
-            <a:ext cx="0" cy="167673"/>
+            <a:off x="2307357" y="5383939"/>
+            <a:ext cx="2866" cy="446494"/>
+          </a:xfrm>
+          <a:prstGeom prst="line">
+            <a:avLst/>
+          </a:prstGeom>
+          <a:ln>
+            <a:solidFill>
+              <a:srgbClr val="7030A0"/>
+            </a:solidFill>
+          </a:ln>
+        </p:spPr>
+        <p:style>
+          <a:lnRef idx="2">
+            <a:schemeClr val="accent1"/>
+          </a:lnRef>
+          <a:fillRef idx="0">
+            <a:schemeClr val="accent1"/>
+          </a:fillRef>
+          <a:effectRef idx="1">
+            <a:schemeClr val="accent1"/>
+          </a:effectRef>
+          <a:fontRef idx="minor">
+            <a:schemeClr val="tx1"/>
+          </a:fontRef>
+        </p:style>
+      </p:cxnSp>
+      <p:sp>
+        <p:nvSpPr>
+          <p:cNvPr id="256" name="TextBox 255">
+            <a:extLst>
+              <a:ext uri="{FF2B5EF4-FFF2-40B4-BE49-F238E27FC236}">
+                <a16:creationId xmlns:a16="http://schemas.microsoft.com/office/drawing/2014/main" id="{DA7AB66C-F74B-512B-70A0-B83ED143D64E}"/>
+              </a:ext>
+            </a:extLst>
+          </p:cNvPr>
+          <p:cNvSpPr txBox="1"/>
+          <p:nvPr/>
+        </p:nvSpPr>
+        <p:spPr>
+          <a:xfrm>
+            <a:off x="2048931" y="5753398"/>
+            <a:ext cx="521297" cy="230832"/>
+          </a:xfrm>
+          <a:prstGeom prst="rect">
+            <a:avLst/>
+          </a:prstGeom>
+          <a:noFill/>
+        </p:spPr>
+        <p:txBody>
+          <a:bodyPr wrap="none" rtlCol="0">
+            <a:spAutoFit/>
+          </a:bodyPr>
+          <a:lstStyle/>
+          <a:p>
+            <a:pPr algn="ctr"/>
+            <a:r>
+              <a:rPr lang="en-US" sz="900" dirty="0" err="1">
+                <a:solidFill>
+                  <a:srgbClr val="7030A0"/>
+                </a:solidFill>
+              </a:rPr>
+              <a:t>alu_op</a:t>
+            </a:r>
+            <a:endParaRPr lang="en-US" sz="900" dirty="0">
+              <a:solidFill>
+                <a:srgbClr val="7030A0"/>
+              </a:solidFill>
+            </a:endParaRPr>
+          </a:p>
+        </p:txBody>
+      </p:sp>
+      <p:sp>
+        <p:nvSpPr>
+          <p:cNvPr id="261" name="TextBox 260">
+            <a:extLst>
+              <a:ext uri="{FF2B5EF4-FFF2-40B4-BE49-F238E27FC236}">
+                <a16:creationId xmlns:a16="http://schemas.microsoft.com/office/drawing/2014/main" id="{7E0A66DD-838A-A62A-9FD8-35BAE8C531C5}"/>
+              </a:ext>
+            </a:extLst>
+          </p:cNvPr>
+          <p:cNvSpPr txBox="1"/>
+          <p:nvPr/>
+        </p:nvSpPr>
+        <p:spPr>
+          <a:xfrm>
+            <a:off x="2735410" y="3477685"/>
+            <a:ext cx="1149675" cy="230832"/>
+          </a:xfrm>
+          <a:prstGeom prst="rect">
+            <a:avLst/>
+          </a:prstGeom>
+          <a:noFill/>
+        </p:spPr>
+        <p:txBody>
+          <a:bodyPr wrap="none" rtlCol="0">
+            <a:spAutoFit/>
+          </a:bodyPr>
+          <a:lstStyle/>
+          <a:p>
+            <a:pPr algn="ctr"/>
+            <a:r>
+              <a:rPr lang="en-US" sz="900" dirty="0" err="1">
+                <a:solidFill>
+                  <a:srgbClr val="7030A0"/>
+                </a:solidFill>
+              </a:rPr>
+              <a:t>mem_wb_reg_write</a:t>
+            </a:r>
+            <a:endParaRPr lang="en-US" sz="900" dirty="0">
+              <a:solidFill>
+                <a:srgbClr val="7030A0"/>
+              </a:solidFill>
+            </a:endParaRPr>
+          </a:p>
+        </p:txBody>
+      </p:sp>
+      <p:cxnSp>
+        <p:nvCxnSpPr>
+          <p:cNvPr id="262" name="Straight Connector 261">
+            <a:extLst>
+              <a:ext uri="{FF2B5EF4-FFF2-40B4-BE49-F238E27FC236}">
+                <a16:creationId xmlns:a16="http://schemas.microsoft.com/office/drawing/2014/main" id="{F5C11D67-250A-6DC9-2E29-EC0DA13D2DAD}"/>
+              </a:ext>
+            </a:extLst>
+          </p:cNvPr>
+          <p:cNvCxnSpPr>
+            <a:cxnSpLocks/>
+          </p:cNvCxnSpPr>
+          <p:nvPr/>
+        </p:nvCxnSpPr>
+        <p:spPr>
+          <a:xfrm flipV="1">
+            <a:off x="3214137" y="3367023"/>
+            <a:ext cx="0" cy="182290"/>
+          </a:xfrm>
+          <a:prstGeom prst="line">
+            <a:avLst/>
+          </a:prstGeom>
+          <a:ln>
+            <a:solidFill>
+              <a:srgbClr val="7030A0"/>
+            </a:solidFill>
+          </a:ln>
+        </p:spPr>
+        <p:style>
+          <a:lnRef idx="2">
+            <a:schemeClr val="accent1"/>
+          </a:lnRef>
+          <a:fillRef idx="0">
+            <a:schemeClr val="accent1"/>
+          </a:fillRef>
+          <a:effectRef idx="1">
+            <a:schemeClr val="accent1"/>
+          </a:effectRef>
+          <a:fontRef idx="minor">
+            <a:schemeClr val="tx1"/>
+          </a:fontRef>
+        </p:style>
+      </p:cxnSp>
+      <p:sp>
+        <p:nvSpPr>
+          <p:cNvPr id="266" name="TextBox 265">
+            <a:extLst>
+              <a:ext uri="{FF2B5EF4-FFF2-40B4-BE49-F238E27FC236}">
+                <a16:creationId xmlns:a16="http://schemas.microsoft.com/office/drawing/2014/main" id="{51731AF6-11D5-E98F-659A-AECA122E34AB}"/>
+              </a:ext>
+            </a:extLst>
+          </p:cNvPr>
+          <p:cNvSpPr txBox="1"/>
+          <p:nvPr/>
+        </p:nvSpPr>
+        <p:spPr>
+          <a:xfrm>
+            <a:off x="2683623" y="4967647"/>
+            <a:ext cx="407484" cy="230832"/>
+          </a:xfrm>
+          <a:prstGeom prst="rect">
+            <a:avLst/>
+          </a:prstGeom>
+          <a:noFill/>
+        </p:spPr>
+        <p:txBody>
+          <a:bodyPr wrap="none" rtlCol="0">
+            <a:spAutoFit/>
+          </a:bodyPr>
+          <a:lstStyle/>
+          <a:p>
+            <a:pPr algn="ctr"/>
+            <a:r>
+              <a:rPr lang="en-US" sz="900" dirty="0" err="1">
+                <a:solidFill>
+                  <a:srgbClr val="7030A0"/>
+                </a:solidFill>
+              </a:rPr>
+              <a:t>instr</a:t>
+            </a:r>
+            <a:endParaRPr lang="en-US" sz="900" dirty="0">
+              <a:solidFill>
+                <a:srgbClr val="7030A0"/>
+              </a:solidFill>
+            </a:endParaRPr>
+          </a:p>
+        </p:txBody>
+      </p:sp>
+      <p:cxnSp>
+        <p:nvCxnSpPr>
+          <p:cNvPr id="267" name="Straight Arrow Connector 266">
+            <a:extLst>
+              <a:ext uri="{FF2B5EF4-FFF2-40B4-BE49-F238E27FC236}">
+                <a16:creationId xmlns:a16="http://schemas.microsoft.com/office/drawing/2014/main" id="{FC692FB0-219E-D13E-435D-A47DB4DE80A0}"/>
+              </a:ext>
+            </a:extLst>
+          </p:cNvPr>
+          <p:cNvCxnSpPr>
+            <a:cxnSpLocks/>
+          </p:cNvCxnSpPr>
+          <p:nvPr/>
+        </p:nvCxnSpPr>
+        <p:spPr>
+          <a:xfrm flipV="1">
+            <a:off x="2591182" y="5311158"/>
+            <a:ext cx="602090" cy="1665"/>
+          </a:xfrm>
+          <a:prstGeom prst="straightConnector1">
+            <a:avLst/>
+          </a:prstGeom>
+          <a:ln>
+            <a:solidFill>
+              <a:srgbClr val="7030A0"/>
+            </a:solidFill>
+            <a:tailEnd type="triangle"/>
+          </a:ln>
+        </p:spPr>
+        <p:style>
+          <a:lnRef idx="2">
+            <a:schemeClr val="accent1"/>
+          </a:lnRef>
+          <a:fillRef idx="0">
+            <a:schemeClr val="accent1"/>
+          </a:fillRef>
+          <a:effectRef idx="1">
+            <a:schemeClr val="accent1"/>
+          </a:effectRef>
+          <a:fontRef idx="minor">
+            <a:schemeClr val="tx1"/>
+          </a:fontRef>
+        </p:style>
+      </p:cxnSp>
+      <p:sp>
+        <p:nvSpPr>
+          <p:cNvPr id="268" name="TextBox 267">
+            <a:extLst>
+              <a:ext uri="{FF2B5EF4-FFF2-40B4-BE49-F238E27FC236}">
+                <a16:creationId xmlns:a16="http://schemas.microsoft.com/office/drawing/2014/main" id="{8CF00C13-6438-2271-21C8-F4FBC12051A0}"/>
+              </a:ext>
+            </a:extLst>
+          </p:cNvPr>
+          <p:cNvSpPr txBox="1"/>
+          <p:nvPr/>
+        </p:nvSpPr>
+        <p:spPr>
+          <a:xfrm>
+            <a:off x="2514755" y="5135469"/>
+            <a:ext cx="692628" cy="230832"/>
+          </a:xfrm>
+          <a:prstGeom prst="rect">
+            <a:avLst/>
+          </a:prstGeom>
+          <a:noFill/>
+        </p:spPr>
+        <p:txBody>
+          <a:bodyPr wrap="square" rtlCol="0">
+            <a:spAutoFit/>
+          </a:bodyPr>
+          <a:lstStyle/>
+          <a:p>
+            <a:pPr algn="ctr"/>
+            <a:r>
+              <a:rPr lang="en-US" sz="900" dirty="0" err="1">
+                <a:solidFill>
+                  <a:srgbClr val="7030A0"/>
+                </a:solidFill>
+              </a:rPr>
+              <a:t>if_id_instr</a:t>
+            </a:r>
+            <a:endParaRPr lang="en-US" sz="900" dirty="0">
+              <a:solidFill>
+                <a:srgbClr val="7030A0"/>
+              </a:solidFill>
+            </a:endParaRPr>
+          </a:p>
+        </p:txBody>
+      </p:sp>
+      <p:cxnSp>
+        <p:nvCxnSpPr>
+          <p:cNvPr id="271" name="Straight Connector 270">
+            <a:extLst>
+              <a:ext uri="{FF2B5EF4-FFF2-40B4-BE49-F238E27FC236}">
+                <a16:creationId xmlns:a16="http://schemas.microsoft.com/office/drawing/2014/main" id="{90DF1796-95A2-27D0-AD73-55395F6CFDEF}"/>
+              </a:ext>
+            </a:extLst>
+          </p:cNvPr>
+          <p:cNvCxnSpPr>
+            <a:cxnSpLocks/>
+          </p:cNvCxnSpPr>
+          <p:nvPr/>
+        </p:nvCxnSpPr>
+        <p:spPr>
+          <a:xfrm flipV="1">
+            <a:off x="2413168" y="4551446"/>
+            <a:ext cx="0" cy="1004594"/>
+          </a:xfrm>
+          <a:prstGeom prst="line">
+            <a:avLst/>
+          </a:prstGeom>
+          <a:ln>
+            <a:solidFill>
+              <a:srgbClr val="7030A0"/>
+            </a:solidFill>
+          </a:ln>
+        </p:spPr>
+        <p:style>
+          <a:lnRef idx="2">
+            <a:schemeClr val="accent1"/>
+          </a:lnRef>
+          <a:fillRef idx="0">
+            <a:schemeClr val="accent1"/>
+          </a:fillRef>
+          <a:effectRef idx="1">
+            <a:schemeClr val="accent1"/>
+          </a:effectRef>
+          <a:fontRef idx="minor">
+            <a:schemeClr val="tx1"/>
+          </a:fontRef>
+        </p:style>
+      </p:cxnSp>
+      <p:cxnSp>
+        <p:nvCxnSpPr>
+          <p:cNvPr id="273" name="Straight Connector 272">
+            <a:extLst>
+              <a:ext uri="{FF2B5EF4-FFF2-40B4-BE49-F238E27FC236}">
+                <a16:creationId xmlns:a16="http://schemas.microsoft.com/office/drawing/2014/main" id="{100AB560-BBF9-BF93-8C8B-EB7350A62741}"/>
+              </a:ext>
+            </a:extLst>
+          </p:cNvPr>
+          <p:cNvCxnSpPr>
+            <a:cxnSpLocks/>
+          </p:cNvCxnSpPr>
+          <p:nvPr/>
+        </p:nvCxnSpPr>
+        <p:spPr>
+          <a:xfrm flipH="1">
+            <a:off x="2286000" y="4881011"/>
+            <a:ext cx="118486" cy="0"/>
+          </a:xfrm>
+          <a:prstGeom prst="line">
+            <a:avLst/>
+          </a:prstGeom>
+          <a:ln>
+            <a:solidFill>
+              <a:srgbClr val="7030A0"/>
+            </a:solidFill>
+          </a:ln>
+        </p:spPr>
+        <p:style>
+          <a:lnRef idx="2">
+            <a:schemeClr val="accent1"/>
+          </a:lnRef>
+          <a:fillRef idx="0">
+            <a:schemeClr val="accent1"/>
+          </a:fillRef>
+          <a:effectRef idx="1">
+            <a:schemeClr val="accent1"/>
+          </a:effectRef>
+          <a:fontRef idx="minor">
+            <a:schemeClr val="tx1"/>
+          </a:fontRef>
+        </p:style>
+      </p:cxnSp>
+      <p:cxnSp>
+        <p:nvCxnSpPr>
+          <p:cNvPr id="276" name="Straight Connector 275">
+            <a:extLst>
+              <a:ext uri="{FF2B5EF4-FFF2-40B4-BE49-F238E27FC236}">
+                <a16:creationId xmlns:a16="http://schemas.microsoft.com/office/drawing/2014/main" id="{362F10F2-374C-A14A-85CA-21429346EBB7}"/>
+              </a:ext>
+            </a:extLst>
+          </p:cNvPr>
+          <p:cNvCxnSpPr>
+            <a:cxnSpLocks/>
+          </p:cNvCxnSpPr>
+          <p:nvPr/>
+        </p:nvCxnSpPr>
+        <p:spPr>
+          <a:xfrm flipH="1">
+            <a:off x="2349584" y="4558392"/>
+            <a:ext cx="69737" cy="0"/>
+          </a:xfrm>
+          <a:prstGeom prst="line">
+            <a:avLst/>
+          </a:prstGeom>
+          <a:ln>
+            <a:solidFill>
+              <a:srgbClr val="7030A0"/>
+            </a:solidFill>
+          </a:ln>
+        </p:spPr>
+        <p:style>
+          <a:lnRef idx="2">
+            <a:schemeClr val="accent1"/>
+          </a:lnRef>
+          <a:fillRef idx="0">
+            <a:schemeClr val="accent1"/>
+          </a:fillRef>
+          <a:effectRef idx="1">
+            <a:schemeClr val="accent1"/>
+          </a:effectRef>
+          <a:fontRef idx="minor">
+            <a:schemeClr val="tx1"/>
+          </a:fontRef>
+        </p:style>
+      </p:cxnSp>
+      <p:cxnSp>
+        <p:nvCxnSpPr>
+          <p:cNvPr id="280" name="Straight Arrow Connector 279">
+            <a:extLst>
+              <a:ext uri="{FF2B5EF4-FFF2-40B4-BE49-F238E27FC236}">
+                <a16:creationId xmlns:a16="http://schemas.microsoft.com/office/drawing/2014/main" id="{E0076D5E-DCA3-ACA3-4093-86275F8B28A2}"/>
+              </a:ext>
+            </a:extLst>
+          </p:cNvPr>
+          <p:cNvCxnSpPr>
+            <a:cxnSpLocks/>
+          </p:cNvCxnSpPr>
+          <p:nvPr/>
+        </p:nvCxnSpPr>
+        <p:spPr>
+          <a:xfrm>
+            <a:off x="2588781" y="5437432"/>
+            <a:ext cx="593452" cy="0"/>
+          </a:xfrm>
+          <a:prstGeom prst="straightConnector1">
+            <a:avLst/>
+          </a:prstGeom>
+          <a:ln>
+            <a:solidFill>
+              <a:srgbClr val="7030A0"/>
+            </a:solidFill>
+            <a:tailEnd type="triangle"/>
+          </a:ln>
+        </p:spPr>
+        <p:style>
+          <a:lnRef idx="2">
+            <a:schemeClr val="accent1"/>
+          </a:lnRef>
+          <a:fillRef idx="0">
+            <a:schemeClr val="accent1"/>
+          </a:fillRef>
+          <a:effectRef idx="1">
+            <a:schemeClr val="accent1"/>
+          </a:effectRef>
+          <a:fontRef idx="minor">
+            <a:schemeClr val="tx1"/>
+          </a:fontRef>
+        </p:style>
+      </p:cxnSp>
+      <p:cxnSp>
+        <p:nvCxnSpPr>
+          <p:cNvPr id="282" name="Straight Connector 281">
+            <a:extLst>
+              <a:ext uri="{FF2B5EF4-FFF2-40B4-BE49-F238E27FC236}">
+                <a16:creationId xmlns:a16="http://schemas.microsoft.com/office/drawing/2014/main" id="{5509F5D6-F1E4-227E-A639-7CB13767E26A}"/>
+              </a:ext>
+            </a:extLst>
+          </p:cNvPr>
+          <p:cNvCxnSpPr>
+            <a:cxnSpLocks/>
+          </p:cNvCxnSpPr>
+          <p:nvPr/>
+        </p:nvCxnSpPr>
+        <p:spPr>
+          <a:xfrm flipH="1">
+            <a:off x="2422252" y="5428384"/>
+            <a:ext cx="46523" cy="0"/>
+          </a:xfrm>
+          <a:prstGeom prst="line">
+            <a:avLst/>
+          </a:prstGeom>
+          <a:ln>
+            <a:solidFill>
+              <a:srgbClr val="7030A0"/>
+            </a:solidFill>
+          </a:ln>
+        </p:spPr>
+        <p:style>
+          <a:lnRef idx="2">
+            <a:schemeClr val="accent1"/>
+          </a:lnRef>
+          <a:fillRef idx="0">
+            <a:schemeClr val="accent1"/>
+          </a:fillRef>
+          <a:effectRef idx="1">
+            <a:schemeClr val="accent1"/>
+          </a:effectRef>
+          <a:fontRef idx="minor">
+            <a:schemeClr val="tx1"/>
+          </a:fontRef>
+        </p:style>
+      </p:cxnSp>
+      <p:sp>
+        <p:nvSpPr>
+          <p:cNvPr id="283" name="TextBox 282">
+            <a:extLst>
+              <a:ext uri="{FF2B5EF4-FFF2-40B4-BE49-F238E27FC236}">
+                <a16:creationId xmlns:a16="http://schemas.microsoft.com/office/drawing/2014/main" id="{A4B10B53-AAC3-65C7-6000-1C3EEA7DF60E}"/>
+              </a:ext>
+            </a:extLst>
+          </p:cNvPr>
+          <p:cNvSpPr txBox="1"/>
+          <p:nvPr/>
+        </p:nvSpPr>
+        <p:spPr>
+          <a:xfrm>
+            <a:off x="2577973" y="5260828"/>
+            <a:ext cx="537328" cy="230832"/>
+          </a:xfrm>
+          <a:prstGeom prst="rect">
+            <a:avLst/>
+          </a:prstGeom>
+          <a:noFill/>
+        </p:spPr>
+        <p:txBody>
+          <a:bodyPr wrap="none" rtlCol="0">
+            <a:spAutoFit/>
+          </a:bodyPr>
+          <a:lstStyle/>
+          <a:p>
+            <a:pPr algn="ctr"/>
+            <a:r>
+              <a:rPr lang="en-US" sz="900" dirty="0">
+                <a:solidFill>
+                  <a:srgbClr val="7030A0"/>
+                </a:solidFill>
+              </a:rPr>
+              <a:t>branch</a:t>
+            </a:r>
+          </a:p>
+        </p:txBody>
+      </p:sp>
+      <p:cxnSp>
+        <p:nvCxnSpPr>
+          <p:cNvPr id="287" name="Straight Connector 286">
+            <a:extLst>
+              <a:ext uri="{FF2B5EF4-FFF2-40B4-BE49-F238E27FC236}">
+                <a16:creationId xmlns:a16="http://schemas.microsoft.com/office/drawing/2014/main" id="{FA796C45-7535-94A4-18D1-E8CFD819DB40}"/>
+              </a:ext>
+            </a:extLst>
+          </p:cNvPr>
+          <p:cNvCxnSpPr>
+            <a:cxnSpLocks/>
+          </p:cNvCxnSpPr>
+          <p:nvPr/>
+        </p:nvCxnSpPr>
+        <p:spPr>
+          <a:xfrm flipH="1">
+            <a:off x="2414577" y="5556664"/>
+            <a:ext cx="46523" cy="0"/>
+          </a:xfrm>
+          <a:prstGeom prst="line">
+            <a:avLst/>
+          </a:prstGeom>
+          <a:ln>
+            <a:solidFill>
+              <a:srgbClr val="7030A0"/>
+            </a:solidFill>
+          </a:ln>
+        </p:spPr>
+        <p:style>
+          <a:lnRef idx="2">
+            <a:schemeClr val="accent1"/>
+          </a:lnRef>
+          <a:fillRef idx="0">
+            <a:schemeClr val="accent1"/>
+          </a:fillRef>
+          <a:effectRef idx="1">
+            <a:schemeClr val="accent1"/>
+          </a:effectRef>
+          <a:fontRef idx="minor">
+            <a:schemeClr val="tx1"/>
+          </a:fontRef>
+        </p:style>
+      </p:cxnSp>
+      <p:cxnSp>
+        <p:nvCxnSpPr>
+          <p:cNvPr id="66" name="Straight Arrow Connector 65">
+            <a:extLst>
+              <a:ext uri="{FF2B5EF4-FFF2-40B4-BE49-F238E27FC236}">
+                <a16:creationId xmlns:a16="http://schemas.microsoft.com/office/drawing/2014/main" id="{1B27F2D0-2759-DE6B-9C52-8E288C3A170F}"/>
+              </a:ext>
+            </a:extLst>
+          </p:cNvPr>
+          <p:cNvCxnSpPr>
+            <a:cxnSpLocks/>
+          </p:cNvCxnSpPr>
+          <p:nvPr/>
+        </p:nvCxnSpPr>
+        <p:spPr>
+          <a:xfrm>
+            <a:off x="2594263" y="5552554"/>
+            <a:ext cx="593452" cy="0"/>
+          </a:xfrm>
+          <a:prstGeom prst="straightConnector1">
+            <a:avLst/>
+          </a:prstGeom>
+          <a:ln>
+            <a:solidFill>
+              <a:srgbClr val="7030A0"/>
+            </a:solidFill>
+            <a:tailEnd type="triangle"/>
+          </a:ln>
+        </p:spPr>
+        <p:style>
+          <a:lnRef idx="2">
+            <a:schemeClr val="accent1"/>
+          </a:lnRef>
+          <a:fillRef idx="0">
+            <a:schemeClr val="accent1"/>
+          </a:fillRef>
+          <a:effectRef idx="1">
+            <a:schemeClr val="accent1"/>
+          </a:effectRef>
+          <a:fontRef idx="minor">
+            <a:schemeClr val="tx1"/>
+          </a:fontRef>
+        </p:style>
+      </p:cxnSp>
+      <p:sp>
+        <p:nvSpPr>
+          <p:cNvPr id="67" name="TextBox 66">
+            <a:extLst>
+              <a:ext uri="{FF2B5EF4-FFF2-40B4-BE49-F238E27FC236}">
+                <a16:creationId xmlns:a16="http://schemas.microsoft.com/office/drawing/2014/main" id="{F86226BE-1F0A-79ED-AEDA-01F20BD2E64F}"/>
+              </a:ext>
+            </a:extLst>
+          </p:cNvPr>
+          <p:cNvSpPr txBox="1"/>
+          <p:nvPr/>
+        </p:nvSpPr>
+        <p:spPr>
+          <a:xfrm>
+            <a:off x="2647294" y="5374838"/>
+            <a:ext cx="437940" cy="230832"/>
+          </a:xfrm>
+          <a:prstGeom prst="rect">
+            <a:avLst/>
+          </a:prstGeom>
+          <a:noFill/>
+        </p:spPr>
+        <p:txBody>
+          <a:bodyPr wrap="none" rtlCol="0">
+            <a:spAutoFit/>
+          </a:bodyPr>
+          <a:lstStyle/>
+          <a:p>
+            <a:pPr algn="ctr"/>
+            <a:r>
+              <a:rPr lang="en-US" sz="900" dirty="0">
+                <a:solidFill>
+                  <a:srgbClr val="7030A0"/>
+                </a:solidFill>
+              </a:rPr>
+              <a:t>jump</a:t>
+            </a:r>
+          </a:p>
+        </p:txBody>
+      </p:sp>
+      <p:cxnSp>
+        <p:nvCxnSpPr>
+          <p:cNvPr id="80" name="Straight Connector 79">
+            <a:extLst>
+              <a:ext uri="{FF2B5EF4-FFF2-40B4-BE49-F238E27FC236}">
+                <a16:creationId xmlns:a16="http://schemas.microsoft.com/office/drawing/2014/main" id="{4E6D21B0-52C0-BB38-50DA-DAB3FE1736A6}"/>
+              </a:ext>
+            </a:extLst>
+          </p:cNvPr>
+          <p:cNvCxnSpPr>
+            <a:cxnSpLocks/>
+          </p:cNvCxnSpPr>
+          <p:nvPr/>
+        </p:nvCxnSpPr>
+        <p:spPr>
+          <a:xfrm>
+            <a:off x="3977662" y="5001790"/>
+            <a:ext cx="0" cy="217062"/>
+          </a:xfrm>
+          <a:prstGeom prst="line">
+            <a:avLst/>
+          </a:prstGeom>
+          <a:ln>
+            <a:solidFill>
+              <a:srgbClr val="7030A0"/>
+            </a:solidFill>
+          </a:ln>
+        </p:spPr>
+        <p:style>
+          <a:lnRef idx="2">
+            <a:schemeClr val="accent1"/>
+          </a:lnRef>
+          <a:fillRef idx="0">
+            <a:schemeClr val="accent1"/>
+          </a:fillRef>
+          <a:effectRef idx="1">
+            <a:schemeClr val="accent1"/>
+          </a:effectRef>
+          <a:fontRef idx="minor">
+            <a:schemeClr val="tx1"/>
+          </a:fontRef>
+        </p:style>
+      </p:cxnSp>
+      <p:cxnSp>
+        <p:nvCxnSpPr>
+          <p:cNvPr id="86" name="Straight Connector 85">
+            <a:extLst>
+              <a:ext uri="{FF2B5EF4-FFF2-40B4-BE49-F238E27FC236}">
+                <a16:creationId xmlns:a16="http://schemas.microsoft.com/office/drawing/2014/main" id="{71A0F292-E74C-F427-C78C-31AC90F9D4FF}"/>
+              </a:ext>
+            </a:extLst>
+          </p:cNvPr>
+          <p:cNvCxnSpPr>
+            <a:cxnSpLocks/>
+          </p:cNvCxnSpPr>
+          <p:nvPr/>
+        </p:nvCxnSpPr>
+        <p:spPr>
+          <a:xfrm>
+            <a:off x="4013843" y="5486162"/>
+            <a:ext cx="0" cy="217062"/>
+          </a:xfrm>
+          <a:prstGeom prst="line">
+            <a:avLst/>
+          </a:prstGeom>
+          <a:ln>
+            <a:solidFill>
+              <a:srgbClr val="7030A0"/>
+            </a:solidFill>
+          </a:ln>
+        </p:spPr>
+        <p:style>
+          <a:lnRef idx="2">
+            <a:schemeClr val="accent1"/>
+          </a:lnRef>
+          <a:fillRef idx="0">
+            <a:schemeClr val="accent1"/>
+          </a:fillRef>
+          <a:effectRef idx="1">
+            <a:schemeClr val="accent1"/>
+          </a:effectRef>
+          <a:fontRef idx="minor">
+            <a:schemeClr val="tx1"/>
+          </a:fontRef>
+        </p:style>
+      </p:cxnSp>
+      <p:sp>
+        <p:nvSpPr>
+          <p:cNvPr id="88" name="TextBox 87">
+            <a:extLst>
+              <a:ext uri="{FF2B5EF4-FFF2-40B4-BE49-F238E27FC236}">
+                <a16:creationId xmlns:a16="http://schemas.microsoft.com/office/drawing/2014/main" id="{F48B1793-7854-6948-2B5C-D7D00266AF18}"/>
+              </a:ext>
+            </a:extLst>
+          </p:cNvPr>
+          <p:cNvSpPr txBox="1"/>
+          <p:nvPr/>
+        </p:nvSpPr>
+        <p:spPr>
+          <a:xfrm>
+            <a:off x="3639142" y="4833283"/>
+            <a:ext cx="681597" cy="230832"/>
+          </a:xfrm>
+          <a:prstGeom prst="rect">
+            <a:avLst/>
+          </a:prstGeom>
+          <a:noFill/>
+        </p:spPr>
+        <p:txBody>
+          <a:bodyPr wrap="none" rtlCol="0">
+            <a:spAutoFit/>
+          </a:bodyPr>
+          <a:lstStyle/>
+          <a:p>
+            <a:pPr algn="ctr"/>
+            <a:r>
+              <a:rPr lang="en-US" sz="900" dirty="0" err="1">
+                <a:solidFill>
+                  <a:srgbClr val="7030A0"/>
+                </a:solidFill>
+              </a:rPr>
+              <a:t>start_stall</a:t>
+            </a:r>
+            <a:endParaRPr lang="en-US" sz="900" dirty="0">
+              <a:solidFill>
+                <a:srgbClr val="7030A0"/>
+              </a:solidFill>
+            </a:endParaRPr>
+          </a:p>
+        </p:txBody>
+      </p:sp>
+      <p:sp>
+        <p:nvSpPr>
+          <p:cNvPr id="92" name="TextBox 91">
+            <a:extLst>
+              <a:ext uri="{FF2B5EF4-FFF2-40B4-BE49-F238E27FC236}">
+                <a16:creationId xmlns:a16="http://schemas.microsoft.com/office/drawing/2014/main" id="{D15390BD-1B8F-FB41-DB4A-63F0946ABD33}"/>
+              </a:ext>
+            </a:extLst>
+          </p:cNvPr>
+          <p:cNvSpPr txBox="1"/>
+          <p:nvPr/>
+        </p:nvSpPr>
+        <p:spPr>
+          <a:xfrm>
+            <a:off x="3609208" y="5637982"/>
+            <a:ext cx="841898" cy="230832"/>
+          </a:xfrm>
+          <a:prstGeom prst="rect">
+            <a:avLst/>
+          </a:prstGeom>
+          <a:noFill/>
+        </p:spPr>
+        <p:txBody>
+          <a:bodyPr wrap="none" rtlCol="0">
+            <a:spAutoFit/>
+          </a:bodyPr>
+          <a:lstStyle/>
+          <a:p>
+            <a:pPr algn="ctr"/>
+            <a:r>
+              <a:rPr lang="en-US" sz="900" dirty="0" err="1">
+                <a:solidFill>
+                  <a:srgbClr val="7030A0"/>
+                </a:solidFill>
+              </a:rPr>
+              <a:t>stall_counter</a:t>
+            </a:r>
+            <a:endParaRPr lang="en-US" sz="900" dirty="0">
+              <a:solidFill>
+                <a:srgbClr val="7030A0"/>
+              </a:solidFill>
+            </a:endParaRPr>
+          </a:p>
+        </p:txBody>
+      </p:sp>
+      <p:cxnSp>
+        <p:nvCxnSpPr>
+          <p:cNvPr id="289" name="Straight Connector 288">
+            <a:extLst>
+              <a:ext uri="{FF2B5EF4-FFF2-40B4-BE49-F238E27FC236}">
+                <a16:creationId xmlns:a16="http://schemas.microsoft.com/office/drawing/2014/main" id="{925C51DE-051E-9ACE-22CA-A81636F894A3}"/>
+              </a:ext>
+            </a:extLst>
+          </p:cNvPr>
+          <p:cNvCxnSpPr>
+            <a:cxnSpLocks/>
+          </p:cNvCxnSpPr>
+          <p:nvPr/>
+        </p:nvCxnSpPr>
+        <p:spPr>
+          <a:xfrm>
+            <a:off x="5429459" y="3482439"/>
+            <a:ext cx="376010" cy="0"/>
+          </a:xfrm>
+          <a:prstGeom prst="line">
+            <a:avLst/>
+          </a:prstGeom>
+          <a:ln>
+            <a:solidFill>
+              <a:srgbClr val="7030A0"/>
+            </a:solidFill>
+          </a:ln>
+        </p:spPr>
+        <p:style>
+          <a:lnRef idx="2">
+            <a:schemeClr val="accent1"/>
+          </a:lnRef>
+          <a:fillRef idx="0">
+            <a:schemeClr val="accent1"/>
+          </a:fillRef>
+          <a:effectRef idx="1">
+            <a:schemeClr val="accent1"/>
+          </a:effectRef>
+          <a:fontRef idx="minor">
+            <a:schemeClr val="tx1"/>
+          </a:fontRef>
+        </p:style>
+      </p:cxnSp>
+      <p:sp>
+        <p:nvSpPr>
+          <p:cNvPr id="293" name="TextBox 292">
+            <a:extLst>
+              <a:ext uri="{FF2B5EF4-FFF2-40B4-BE49-F238E27FC236}">
+                <a16:creationId xmlns:a16="http://schemas.microsoft.com/office/drawing/2014/main" id="{A3E2059E-C970-2E09-2DFA-D979B27FBFFD}"/>
+              </a:ext>
+            </a:extLst>
+          </p:cNvPr>
+          <p:cNvSpPr txBox="1"/>
+          <p:nvPr/>
+        </p:nvSpPr>
+        <p:spPr>
+          <a:xfrm>
+            <a:off x="5369317" y="3446821"/>
+            <a:ext cx="861133" cy="230832"/>
+          </a:xfrm>
+          <a:prstGeom prst="rect">
+            <a:avLst/>
+          </a:prstGeom>
+          <a:noFill/>
+        </p:spPr>
+        <p:txBody>
+          <a:bodyPr wrap="none" rtlCol="0">
+            <a:spAutoFit/>
+          </a:bodyPr>
+          <a:lstStyle/>
+          <a:p>
+            <a:pPr algn="ctr"/>
+            <a:r>
+              <a:rPr lang="en-US" sz="900" dirty="0" err="1">
+                <a:solidFill>
+                  <a:srgbClr val="7030A0"/>
+                </a:solidFill>
+              </a:rPr>
+              <a:t>id_ex_alu_src</a:t>
+            </a:r>
+            <a:endParaRPr lang="en-US" sz="900" dirty="0">
+              <a:solidFill>
+                <a:srgbClr val="7030A0"/>
+              </a:solidFill>
+            </a:endParaRPr>
+          </a:p>
+        </p:txBody>
+      </p:sp>
+      <p:cxnSp>
+        <p:nvCxnSpPr>
+          <p:cNvPr id="294" name="Straight Connector 293">
+            <a:extLst>
+              <a:ext uri="{FF2B5EF4-FFF2-40B4-BE49-F238E27FC236}">
+                <a16:creationId xmlns:a16="http://schemas.microsoft.com/office/drawing/2014/main" id="{F932C79F-BD54-5E28-BCE5-33409FF23923}"/>
+              </a:ext>
+            </a:extLst>
+          </p:cNvPr>
+          <p:cNvCxnSpPr>
+            <a:cxnSpLocks/>
+          </p:cNvCxnSpPr>
+          <p:nvPr/>
+        </p:nvCxnSpPr>
+        <p:spPr>
+          <a:xfrm>
+            <a:off x="5428828" y="3794927"/>
+            <a:ext cx="838718" cy="0"/>
+          </a:xfrm>
+          <a:prstGeom prst="line">
+            <a:avLst/>
+          </a:prstGeom>
+          <a:ln>
+            <a:solidFill>
+              <a:srgbClr val="7030A0"/>
+            </a:solidFill>
+          </a:ln>
+        </p:spPr>
+        <p:style>
+          <a:lnRef idx="2">
+            <a:schemeClr val="accent1"/>
+          </a:lnRef>
+          <a:fillRef idx="0">
+            <a:schemeClr val="accent1"/>
+          </a:fillRef>
+          <a:effectRef idx="1">
+            <a:schemeClr val="accent1"/>
+          </a:effectRef>
+          <a:fontRef idx="minor">
+            <a:schemeClr val="tx1"/>
+          </a:fontRef>
+        </p:style>
+      </p:cxnSp>
+      <p:sp>
+        <p:nvSpPr>
+          <p:cNvPr id="298" name="TextBox 297">
+            <a:extLst>
+              <a:ext uri="{FF2B5EF4-FFF2-40B4-BE49-F238E27FC236}">
+                <a16:creationId xmlns:a16="http://schemas.microsoft.com/office/drawing/2014/main" id="{CA2CAC2B-6176-8633-F6AE-1E16C967F30A}"/>
+              </a:ext>
+            </a:extLst>
+          </p:cNvPr>
+          <p:cNvSpPr txBox="1"/>
+          <p:nvPr/>
+        </p:nvSpPr>
+        <p:spPr>
+          <a:xfrm>
+            <a:off x="5408725" y="3761954"/>
+            <a:ext cx="830677" cy="230832"/>
+          </a:xfrm>
+          <a:prstGeom prst="rect">
+            <a:avLst/>
+          </a:prstGeom>
+          <a:noFill/>
+        </p:spPr>
+        <p:txBody>
+          <a:bodyPr wrap="none" rtlCol="0">
+            <a:spAutoFit/>
+          </a:bodyPr>
+          <a:lstStyle/>
+          <a:p>
+            <a:pPr algn="ctr"/>
+            <a:r>
+              <a:rPr lang="en-US" sz="900" dirty="0" err="1">
+                <a:solidFill>
+                  <a:srgbClr val="7030A0"/>
+                </a:solidFill>
+              </a:rPr>
+              <a:t>id_ex_alu_op</a:t>
+            </a:r>
+            <a:endParaRPr lang="en-US" sz="900" dirty="0">
+              <a:solidFill>
+                <a:srgbClr val="7030A0"/>
+              </a:solidFill>
+            </a:endParaRPr>
+          </a:p>
+        </p:txBody>
+      </p:sp>
+      <p:sp>
+        <p:nvSpPr>
+          <p:cNvPr id="300" name="TextBox 299">
+            <a:extLst>
+              <a:ext uri="{FF2B5EF4-FFF2-40B4-BE49-F238E27FC236}">
+                <a16:creationId xmlns:a16="http://schemas.microsoft.com/office/drawing/2014/main" id="{3F3EDE0A-4BB0-D9EA-E771-BCA324C6E369}"/>
+              </a:ext>
+            </a:extLst>
+          </p:cNvPr>
+          <p:cNvSpPr txBox="1"/>
+          <p:nvPr/>
+        </p:nvSpPr>
+        <p:spPr>
+          <a:xfrm>
+            <a:off x="7391953" y="2548254"/>
+            <a:ext cx="1192955" cy="230832"/>
+          </a:xfrm>
+          <a:prstGeom prst="rect">
+            <a:avLst/>
+          </a:prstGeom>
+          <a:noFill/>
+        </p:spPr>
+        <p:txBody>
+          <a:bodyPr wrap="none" rtlCol="0">
+            <a:spAutoFit/>
+          </a:bodyPr>
+          <a:lstStyle/>
+          <a:p>
+            <a:pPr algn="ctr"/>
+            <a:r>
+              <a:rPr lang="en-US" sz="900" dirty="0" err="1">
+                <a:solidFill>
+                  <a:srgbClr val="7030A0"/>
+                </a:solidFill>
+              </a:rPr>
+              <a:t>ex_mem_mem_read</a:t>
+            </a:r>
+            <a:endParaRPr lang="en-US" sz="900" dirty="0">
+              <a:solidFill>
+                <a:srgbClr val="7030A0"/>
+              </a:solidFill>
+            </a:endParaRPr>
+          </a:p>
+        </p:txBody>
+      </p:sp>
+      <p:cxnSp>
+        <p:nvCxnSpPr>
+          <p:cNvPr id="301" name="Straight Connector 300">
+            <a:extLst>
+              <a:ext uri="{FF2B5EF4-FFF2-40B4-BE49-F238E27FC236}">
+                <a16:creationId xmlns:a16="http://schemas.microsoft.com/office/drawing/2014/main" id="{AD7B9AFB-47A0-A1FE-9597-9DBE62D78999}"/>
+              </a:ext>
+            </a:extLst>
+          </p:cNvPr>
+          <p:cNvCxnSpPr>
+            <a:cxnSpLocks/>
+          </p:cNvCxnSpPr>
+          <p:nvPr/>
+        </p:nvCxnSpPr>
+        <p:spPr>
+          <a:xfrm flipH="1">
+            <a:off x="7469852" y="2602555"/>
+            <a:ext cx="913823" cy="0"/>
+          </a:xfrm>
+          <a:prstGeom prst="line">
+            <a:avLst/>
+          </a:prstGeom>
+          <a:ln>
+            <a:solidFill>
+              <a:srgbClr val="7030A0"/>
+            </a:solidFill>
+          </a:ln>
+        </p:spPr>
+        <p:style>
+          <a:lnRef idx="2">
+            <a:schemeClr val="accent1"/>
+          </a:lnRef>
+          <a:fillRef idx="0">
+            <a:schemeClr val="accent1"/>
+          </a:fillRef>
+          <a:effectRef idx="1">
+            <a:schemeClr val="accent1"/>
+          </a:effectRef>
+          <a:fontRef idx="minor">
+            <a:schemeClr val="tx1"/>
+          </a:fontRef>
+        </p:style>
+      </p:cxnSp>
+      <p:cxnSp>
+        <p:nvCxnSpPr>
+          <p:cNvPr id="315" name="Straight Connector 314">
+            <a:extLst>
+              <a:ext uri="{FF2B5EF4-FFF2-40B4-BE49-F238E27FC236}">
+                <a16:creationId xmlns:a16="http://schemas.microsoft.com/office/drawing/2014/main" id="{4C53D096-85CA-5466-C4CE-C03B0A82EC6D}"/>
+              </a:ext>
+            </a:extLst>
+          </p:cNvPr>
+          <p:cNvCxnSpPr>
+            <a:cxnSpLocks/>
+          </p:cNvCxnSpPr>
+          <p:nvPr/>
+        </p:nvCxnSpPr>
+        <p:spPr>
+          <a:xfrm flipH="1">
+            <a:off x="7459226" y="2833387"/>
+            <a:ext cx="1272792" cy="0"/>
+          </a:xfrm>
+          <a:prstGeom prst="line">
+            <a:avLst/>
+          </a:prstGeom>
+          <a:ln>
+            <a:solidFill>
+              <a:srgbClr val="7030A0"/>
+            </a:solidFill>
+          </a:ln>
+        </p:spPr>
+        <p:style>
+          <a:lnRef idx="2">
+            <a:schemeClr val="accent1"/>
+          </a:lnRef>
+          <a:fillRef idx="0">
+            <a:schemeClr val="accent1"/>
+          </a:fillRef>
+          <a:effectRef idx="1">
+            <a:schemeClr val="accent1"/>
+          </a:effectRef>
+          <a:fontRef idx="minor">
+            <a:schemeClr val="tx1"/>
+          </a:fontRef>
+        </p:style>
+      </p:cxnSp>
+      <p:sp>
+        <p:nvSpPr>
+          <p:cNvPr id="105" name="TextBox 104">
+            <a:extLst>
+              <a:ext uri="{FF2B5EF4-FFF2-40B4-BE49-F238E27FC236}">
+                <a16:creationId xmlns:a16="http://schemas.microsoft.com/office/drawing/2014/main" id="{C2087D0E-7408-5FAC-C927-AB6DC4D3EC64}"/>
+              </a:ext>
+            </a:extLst>
+          </p:cNvPr>
+          <p:cNvSpPr txBox="1"/>
+          <p:nvPr/>
+        </p:nvSpPr>
+        <p:spPr>
+          <a:xfrm>
+            <a:off x="7608268" y="2764176"/>
+            <a:ext cx="1215397" cy="230832"/>
+          </a:xfrm>
+          <a:prstGeom prst="rect">
+            <a:avLst/>
+          </a:prstGeom>
+          <a:noFill/>
+        </p:spPr>
+        <p:txBody>
+          <a:bodyPr wrap="none" rtlCol="0">
+            <a:spAutoFit/>
+          </a:bodyPr>
+          <a:lstStyle/>
+          <a:p>
+            <a:pPr algn="ctr"/>
+            <a:r>
+              <a:rPr lang="en-US" sz="900" dirty="0" err="1">
+                <a:solidFill>
+                  <a:srgbClr val="7030A0"/>
+                </a:solidFill>
+              </a:rPr>
+              <a:t>ex_mem_mem_write</a:t>
+            </a:r>
+            <a:endParaRPr lang="en-US" sz="900" dirty="0">
+              <a:solidFill>
+                <a:srgbClr val="7030A0"/>
+              </a:solidFill>
+            </a:endParaRPr>
+          </a:p>
+        </p:txBody>
+      </p:sp>
+      <p:cxnSp>
+        <p:nvCxnSpPr>
+          <p:cNvPr id="321" name="Straight Connector 320">
+            <a:extLst>
+              <a:ext uri="{FF2B5EF4-FFF2-40B4-BE49-F238E27FC236}">
+                <a16:creationId xmlns:a16="http://schemas.microsoft.com/office/drawing/2014/main" id="{A23F4DE0-7732-1327-C95B-48323D854E8B}"/>
+              </a:ext>
+            </a:extLst>
+          </p:cNvPr>
+          <p:cNvCxnSpPr>
+            <a:cxnSpLocks/>
+          </p:cNvCxnSpPr>
+          <p:nvPr/>
+        </p:nvCxnSpPr>
+        <p:spPr>
+          <a:xfrm flipH="1">
+            <a:off x="7439539" y="3373347"/>
+            <a:ext cx="1815402" cy="7299"/>
+          </a:xfrm>
+          <a:prstGeom prst="line">
+            <a:avLst/>
+          </a:prstGeom>
+          <a:ln>
+            <a:solidFill>
+              <a:srgbClr val="7030A0"/>
+            </a:solidFill>
+          </a:ln>
+        </p:spPr>
+        <p:style>
+          <a:lnRef idx="2">
+            <a:schemeClr val="accent1"/>
+          </a:lnRef>
+          <a:fillRef idx="0">
+            <a:schemeClr val="accent1"/>
+          </a:fillRef>
+          <a:effectRef idx="1">
+            <a:schemeClr val="accent1"/>
+          </a:effectRef>
+          <a:fontRef idx="minor">
+            <a:schemeClr val="tx1"/>
+          </a:fontRef>
+        </p:style>
+      </p:cxnSp>
+      <p:cxnSp>
+        <p:nvCxnSpPr>
+          <p:cNvPr id="325" name="Straight Connector 324">
+            <a:extLst>
+              <a:ext uri="{FF2B5EF4-FFF2-40B4-BE49-F238E27FC236}">
+                <a16:creationId xmlns:a16="http://schemas.microsoft.com/office/drawing/2014/main" id="{5CD781F9-6391-3C7E-925B-0B032796D2CF}"/>
+              </a:ext>
+            </a:extLst>
+          </p:cNvPr>
+          <p:cNvCxnSpPr>
+            <a:cxnSpLocks/>
+          </p:cNvCxnSpPr>
+          <p:nvPr/>
+        </p:nvCxnSpPr>
+        <p:spPr>
+          <a:xfrm flipH="1">
+            <a:off x="7469852" y="3193986"/>
+            <a:ext cx="2143071" cy="0"/>
+          </a:xfrm>
+          <a:prstGeom prst="line">
+            <a:avLst/>
+          </a:prstGeom>
+          <a:ln>
+            <a:solidFill>
+              <a:srgbClr val="7030A0"/>
+            </a:solidFill>
+          </a:ln>
+        </p:spPr>
+        <p:style>
+          <a:lnRef idx="2">
+            <a:schemeClr val="accent1"/>
+          </a:lnRef>
+          <a:fillRef idx="0">
+            <a:schemeClr val="accent1"/>
+          </a:fillRef>
+          <a:effectRef idx="1">
+            <a:schemeClr val="accent1"/>
+          </a:effectRef>
+          <a:fontRef idx="minor">
+            <a:schemeClr val="tx1"/>
+          </a:fontRef>
+        </p:style>
+      </p:cxnSp>
+      <p:sp>
+        <p:nvSpPr>
+          <p:cNvPr id="329" name="TextBox 328">
+            <a:extLst>
+              <a:ext uri="{FF2B5EF4-FFF2-40B4-BE49-F238E27FC236}">
+                <a16:creationId xmlns:a16="http://schemas.microsoft.com/office/drawing/2014/main" id="{ADDDB348-A431-EEAD-EC96-7C474595CC53}"/>
+              </a:ext>
+            </a:extLst>
+          </p:cNvPr>
+          <p:cNvSpPr txBox="1"/>
+          <p:nvPr/>
+        </p:nvSpPr>
+        <p:spPr>
+          <a:xfrm>
+            <a:off x="7544094" y="3327530"/>
+            <a:ext cx="1151277" cy="230832"/>
+          </a:xfrm>
+          <a:prstGeom prst="rect">
+            <a:avLst/>
+          </a:prstGeom>
+          <a:noFill/>
+        </p:spPr>
+        <p:txBody>
+          <a:bodyPr wrap="none" rtlCol="0">
+            <a:spAutoFit/>
+          </a:bodyPr>
+          <a:lstStyle/>
+          <a:p>
+            <a:pPr algn="ctr"/>
+            <a:r>
+              <a:rPr lang="en-US" sz="900" dirty="0">
+                <a:solidFill>
+                  <a:srgbClr val="7030A0"/>
+                </a:solidFill>
+              </a:rPr>
+              <a:t>ex_mem_reg1_data</a:t>
+            </a:r>
+          </a:p>
+        </p:txBody>
+      </p:sp>
+      <p:sp>
+        <p:nvSpPr>
+          <p:cNvPr id="330" name="TextBox 329">
+            <a:extLst>
+              <a:ext uri="{FF2B5EF4-FFF2-40B4-BE49-F238E27FC236}">
+                <a16:creationId xmlns:a16="http://schemas.microsoft.com/office/drawing/2014/main" id="{877F0128-79BA-304E-C977-F6C8BBAAADA3}"/>
+              </a:ext>
+            </a:extLst>
+          </p:cNvPr>
+          <p:cNvSpPr txBox="1"/>
+          <p:nvPr/>
+        </p:nvSpPr>
+        <p:spPr>
+          <a:xfrm>
+            <a:off x="8130812" y="3128892"/>
+            <a:ext cx="1151277" cy="230832"/>
+          </a:xfrm>
+          <a:prstGeom prst="rect">
+            <a:avLst/>
+          </a:prstGeom>
+          <a:noFill/>
+        </p:spPr>
+        <p:txBody>
+          <a:bodyPr wrap="none" rtlCol="0">
+            <a:spAutoFit/>
+          </a:bodyPr>
+          <a:lstStyle/>
+          <a:p>
+            <a:pPr algn="ctr"/>
+            <a:r>
+              <a:rPr lang="en-US" sz="900" dirty="0">
+                <a:solidFill>
+                  <a:srgbClr val="7030A0"/>
+                </a:solidFill>
+              </a:rPr>
+              <a:t>ex_mem_reg2_data</a:t>
+            </a:r>
+          </a:p>
+        </p:txBody>
+      </p:sp>
+      <p:sp>
+        <p:nvSpPr>
+          <p:cNvPr id="332" name="TextBox 331">
+            <a:extLst>
+              <a:ext uri="{FF2B5EF4-FFF2-40B4-BE49-F238E27FC236}">
+                <a16:creationId xmlns:a16="http://schemas.microsoft.com/office/drawing/2014/main" id="{A9B26448-14AF-D019-A59D-B3C439399CA2}"/>
+              </a:ext>
+            </a:extLst>
+          </p:cNvPr>
+          <p:cNvSpPr txBox="1"/>
+          <p:nvPr/>
+        </p:nvSpPr>
+        <p:spPr>
+          <a:xfrm>
+            <a:off x="8587976" y="3931697"/>
+            <a:ext cx="918842" cy="230832"/>
+          </a:xfrm>
+          <a:prstGeom prst="rect">
+            <a:avLst/>
+          </a:prstGeom>
+          <a:noFill/>
+        </p:spPr>
+        <p:txBody>
+          <a:bodyPr wrap="none" rtlCol="0">
+            <a:spAutoFit/>
+          </a:bodyPr>
+          <a:lstStyle/>
+          <a:p>
+            <a:pPr algn="ctr"/>
+            <a:r>
+              <a:rPr lang="en-US" sz="900" dirty="0" err="1">
+                <a:solidFill>
+                  <a:srgbClr val="7030A0"/>
+                </a:solidFill>
+              </a:rPr>
+              <a:t>not_equal_flag</a:t>
+            </a:r>
+            <a:endParaRPr lang="en-US" sz="900" dirty="0">
+              <a:solidFill>
+                <a:srgbClr val="7030A0"/>
+              </a:solidFill>
+            </a:endParaRPr>
+          </a:p>
+        </p:txBody>
+      </p:sp>
+      <p:cxnSp>
+        <p:nvCxnSpPr>
+          <p:cNvPr id="348" name="Straight Connector 347">
+            <a:extLst>
+              <a:ext uri="{FF2B5EF4-FFF2-40B4-BE49-F238E27FC236}">
+                <a16:creationId xmlns:a16="http://schemas.microsoft.com/office/drawing/2014/main" id="{3E3C7B4F-2C76-0F12-63C7-861ED4C23158}"/>
+              </a:ext>
+            </a:extLst>
+          </p:cNvPr>
+          <p:cNvCxnSpPr>
+            <a:cxnSpLocks/>
+          </p:cNvCxnSpPr>
+          <p:nvPr/>
+        </p:nvCxnSpPr>
+        <p:spPr>
+          <a:xfrm flipH="1">
+            <a:off x="7445956" y="5445669"/>
+            <a:ext cx="1996145" cy="0"/>
+          </a:xfrm>
+          <a:prstGeom prst="line">
+            <a:avLst/>
+          </a:prstGeom>
+          <a:ln>
+            <a:solidFill>
+              <a:srgbClr val="7030A0"/>
+            </a:solidFill>
+          </a:ln>
+        </p:spPr>
+        <p:style>
+          <a:lnRef idx="2">
+            <a:schemeClr val="accent1"/>
+          </a:lnRef>
+          <a:fillRef idx="0">
+            <a:schemeClr val="accent1"/>
+          </a:fillRef>
+          <a:effectRef idx="1">
+            <a:schemeClr val="accent1"/>
+          </a:effectRef>
+          <a:fontRef idx="minor">
+            <a:schemeClr val="tx1"/>
+          </a:fontRef>
+        </p:style>
+      </p:cxnSp>
+      <p:sp>
+        <p:nvSpPr>
+          <p:cNvPr id="349" name="TextBox 348">
+            <a:extLst>
+              <a:ext uri="{FF2B5EF4-FFF2-40B4-BE49-F238E27FC236}">
+                <a16:creationId xmlns:a16="http://schemas.microsoft.com/office/drawing/2014/main" id="{EA56FE53-482D-9456-7988-44BB64036F73}"/>
+              </a:ext>
+            </a:extLst>
+          </p:cNvPr>
+          <p:cNvSpPr txBox="1"/>
+          <p:nvPr/>
+        </p:nvSpPr>
+        <p:spPr>
+          <a:xfrm>
+            <a:off x="7392356" y="5002415"/>
+            <a:ext cx="681597" cy="230832"/>
+          </a:xfrm>
+          <a:prstGeom prst="rect">
+            <a:avLst/>
+          </a:prstGeom>
+          <a:noFill/>
+        </p:spPr>
+        <p:txBody>
+          <a:bodyPr wrap="none" rtlCol="0">
+            <a:spAutoFit/>
+          </a:bodyPr>
+          <a:lstStyle/>
+          <a:p>
+            <a:pPr algn="ctr"/>
+            <a:r>
+              <a:rPr lang="en-US" sz="900" dirty="0" err="1">
+                <a:solidFill>
+                  <a:srgbClr val="7030A0"/>
+                </a:solidFill>
+              </a:rPr>
+              <a:t>start_stall</a:t>
+            </a:r>
+            <a:endParaRPr lang="en-US" sz="900" dirty="0">
+              <a:solidFill>
+                <a:srgbClr val="7030A0"/>
+              </a:solidFill>
+            </a:endParaRPr>
+          </a:p>
+        </p:txBody>
+      </p:sp>
+      <p:sp>
+        <p:nvSpPr>
+          <p:cNvPr id="350" name="TextBox 349">
+            <a:extLst>
+              <a:ext uri="{FF2B5EF4-FFF2-40B4-BE49-F238E27FC236}">
+                <a16:creationId xmlns:a16="http://schemas.microsoft.com/office/drawing/2014/main" id="{3BE05CB1-CBB2-0B1F-CFA9-8CFB6B6AFB80}"/>
+              </a:ext>
+            </a:extLst>
+          </p:cNvPr>
+          <p:cNvSpPr txBox="1"/>
+          <p:nvPr/>
+        </p:nvSpPr>
+        <p:spPr>
+          <a:xfrm>
+            <a:off x="7544161" y="5178995"/>
+            <a:ext cx="1011816" cy="230832"/>
+          </a:xfrm>
+          <a:prstGeom prst="rect">
+            <a:avLst/>
+          </a:prstGeom>
+          <a:noFill/>
+        </p:spPr>
+        <p:txBody>
+          <a:bodyPr wrap="none" rtlCol="0">
+            <a:spAutoFit/>
+          </a:bodyPr>
+          <a:lstStyle/>
+          <a:p>
+            <a:pPr algn="ctr"/>
+            <a:r>
+              <a:rPr lang="en-US" sz="900" dirty="0" err="1">
+                <a:solidFill>
+                  <a:srgbClr val="7030A0"/>
+                </a:solidFill>
+              </a:rPr>
+              <a:t>ex_mem_branch</a:t>
+            </a:r>
+            <a:endParaRPr lang="en-US" sz="900" dirty="0">
+              <a:solidFill>
+                <a:srgbClr val="7030A0"/>
+              </a:solidFill>
+            </a:endParaRPr>
+          </a:p>
+        </p:txBody>
+      </p:sp>
+      <p:sp>
+        <p:nvSpPr>
+          <p:cNvPr id="351" name="TextBox 350">
+            <a:extLst>
+              <a:ext uri="{FF2B5EF4-FFF2-40B4-BE49-F238E27FC236}">
+                <a16:creationId xmlns:a16="http://schemas.microsoft.com/office/drawing/2014/main" id="{AC119BE6-E7D1-6CB1-131D-78C2879B6E6E}"/>
+              </a:ext>
+            </a:extLst>
+          </p:cNvPr>
+          <p:cNvSpPr txBox="1"/>
+          <p:nvPr/>
+        </p:nvSpPr>
+        <p:spPr>
+          <a:xfrm>
+            <a:off x="7862715" y="5371874"/>
+            <a:ext cx="912430" cy="230832"/>
+          </a:xfrm>
+          <a:prstGeom prst="rect">
+            <a:avLst/>
+          </a:prstGeom>
+          <a:noFill/>
+        </p:spPr>
+        <p:txBody>
+          <a:bodyPr wrap="none" rtlCol="0">
+            <a:spAutoFit/>
+          </a:bodyPr>
+          <a:lstStyle/>
+          <a:p>
+            <a:pPr algn="ctr"/>
+            <a:r>
+              <a:rPr lang="en-US" sz="900" dirty="0" err="1">
+                <a:solidFill>
+                  <a:srgbClr val="7030A0"/>
+                </a:solidFill>
+              </a:rPr>
+              <a:t>ex_mem_jump</a:t>
+            </a:r>
+            <a:endParaRPr lang="en-US" sz="900" dirty="0">
+              <a:solidFill>
+                <a:srgbClr val="7030A0"/>
+              </a:solidFill>
+            </a:endParaRPr>
+          </a:p>
+        </p:txBody>
+      </p:sp>
+      <p:sp>
+        <p:nvSpPr>
+          <p:cNvPr id="175" name="TextBox 174">
+            <a:extLst>
+              <a:ext uri="{FF2B5EF4-FFF2-40B4-BE49-F238E27FC236}">
+                <a16:creationId xmlns:a16="http://schemas.microsoft.com/office/drawing/2014/main" id="{6A6DA6DA-B405-64EF-3F99-5CB18A4D3123}"/>
+              </a:ext>
+            </a:extLst>
+          </p:cNvPr>
+          <p:cNvSpPr txBox="1"/>
+          <p:nvPr/>
+        </p:nvSpPr>
+        <p:spPr>
+          <a:xfrm>
+            <a:off x="8518639" y="5522566"/>
+            <a:ext cx="841898" cy="230832"/>
+          </a:xfrm>
+          <a:prstGeom prst="rect">
+            <a:avLst/>
+          </a:prstGeom>
+          <a:noFill/>
+        </p:spPr>
+        <p:txBody>
+          <a:bodyPr wrap="none" rtlCol="0">
+            <a:spAutoFit/>
+          </a:bodyPr>
+          <a:lstStyle/>
+          <a:p>
+            <a:pPr algn="ctr"/>
+            <a:r>
+              <a:rPr lang="en-US" sz="900" dirty="0" err="1">
+                <a:solidFill>
+                  <a:srgbClr val="7030A0"/>
+                </a:solidFill>
+              </a:rPr>
+              <a:t>stall_counter</a:t>
+            </a:r>
+            <a:endParaRPr lang="en-US" sz="900" dirty="0">
+              <a:solidFill>
+                <a:srgbClr val="7030A0"/>
+              </a:solidFill>
+            </a:endParaRPr>
+          </a:p>
+        </p:txBody>
+      </p:sp>
+      <p:cxnSp>
+        <p:nvCxnSpPr>
+          <p:cNvPr id="179" name="Straight Connector 178">
+            <a:extLst>
+              <a:ext uri="{FF2B5EF4-FFF2-40B4-BE49-F238E27FC236}">
+                <a16:creationId xmlns:a16="http://schemas.microsoft.com/office/drawing/2014/main" id="{55F5C684-AB49-F099-8801-3C7B59A5BE87}"/>
+              </a:ext>
+            </a:extLst>
+          </p:cNvPr>
+          <p:cNvCxnSpPr>
+            <a:cxnSpLocks/>
+          </p:cNvCxnSpPr>
+          <p:nvPr/>
+        </p:nvCxnSpPr>
+        <p:spPr>
+          <a:xfrm flipH="1">
+            <a:off x="9989736" y="3605562"/>
+            <a:ext cx="1187380" cy="0"/>
+          </a:xfrm>
+          <a:prstGeom prst="line">
+            <a:avLst/>
+          </a:prstGeom>
+          <a:ln>
+            <a:solidFill>
+              <a:srgbClr val="7030A0"/>
+            </a:solidFill>
+          </a:ln>
+        </p:spPr>
+        <p:style>
+          <a:lnRef idx="2">
+            <a:schemeClr val="accent1"/>
+          </a:lnRef>
+          <a:fillRef idx="0">
+            <a:schemeClr val="accent1"/>
+          </a:fillRef>
+          <a:effectRef idx="1">
+            <a:schemeClr val="accent1"/>
+          </a:effectRef>
+          <a:fontRef idx="minor">
+            <a:schemeClr val="tx1"/>
+          </a:fontRef>
+        </p:style>
+      </p:cxnSp>
+      <p:cxnSp>
+        <p:nvCxnSpPr>
+          <p:cNvPr id="180" name="Straight Connector 179">
+            <a:extLst>
+              <a:ext uri="{FF2B5EF4-FFF2-40B4-BE49-F238E27FC236}">
+                <a16:creationId xmlns:a16="http://schemas.microsoft.com/office/drawing/2014/main" id="{7176820B-0B6C-D96C-D702-CE3A82E03EE7}"/>
+              </a:ext>
+            </a:extLst>
+          </p:cNvPr>
+          <p:cNvCxnSpPr>
+            <a:cxnSpLocks/>
+          </p:cNvCxnSpPr>
+          <p:nvPr/>
+        </p:nvCxnSpPr>
+        <p:spPr>
+          <a:xfrm flipH="1">
+            <a:off x="9998110" y="3794927"/>
+            <a:ext cx="1172308" cy="0"/>
+          </a:xfrm>
+          <a:prstGeom prst="line">
+            <a:avLst/>
+          </a:prstGeom>
+          <a:ln>
+            <a:solidFill>
+              <a:srgbClr val="7030A0"/>
+            </a:solidFill>
+          </a:ln>
+        </p:spPr>
+        <p:style>
+          <a:lnRef idx="2">
+            <a:schemeClr val="accent1"/>
+          </a:lnRef>
+          <a:fillRef idx="0">
+            <a:schemeClr val="accent1"/>
+          </a:fillRef>
+          <a:effectRef idx="1">
+            <a:schemeClr val="accent1"/>
+          </a:effectRef>
+          <a:fontRef idx="minor">
+            <a:schemeClr val="tx1"/>
+          </a:fontRef>
+        </p:style>
+      </p:cxnSp>
+      <p:sp>
+        <p:nvSpPr>
+          <p:cNvPr id="182" name="TextBox 181">
+            <a:extLst>
+              <a:ext uri="{FF2B5EF4-FFF2-40B4-BE49-F238E27FC236}">
+                <a16:creationId xmlns:a16="http://schemas.microsoft.com/office/drawing/2014/main" id="{4BFD961E-B968-E9CA-C693-3E08C8A6B322}"/>
+              </a:ext>
+            </a:extLst>
+          </p:cNvPr>
+          <p:cNvSpPr txBox="1"/>
+          <p:nvPr/>
+        </p:nvSpPr>
+        <p:spPr>
+          <a:xfrm>
+            <a:off x="9969639" y="3358493"/>
+            <a:ext cx="1228221" cy="230832"/>
+          </a:xfrm>
+          <a:prstGeom prst="rect">
+            <a:avLst/>
+          </a:prstGeom>
+          <a:noFill/>
+        </p:spPr>
+        <p:txBody>
+          <a:bodyPr wrap="none" rtlCol="0">
+            <a:spAutoFit/>
+          </a:bodyPr>
+          <a:lstStyle/>
+          <a:p>
+            <a:pPr algn="ctr"/>
+            <a:r>
+              <a:rPr lang="en-US" sz="900" dirty="0" err="1">
+                <a:solidFill>
+                  <a:srgbClr val="7030A0"/>
+                </a:solidFill>
+              </a:rPr>
+              <a:t>mem_wb_mem_read</a:t>
+            </a:r>
+            <a:endParaRPr lang="en-US" sz="900" dirty="0">
+              <a:solidFill>
+                <a:srgbClr val="7030A0"/>
+              </a:solidFill>
+            </a:endParaRPr>
+          </a:p>
+        </p:txBody>
+      </p:sp>
+      <p:cxnSp>
+        <p:nvCxnSpPr>
+          <p:cNvPr id="185" name="Straight Connector 184">
+            <a:extLst>
+              <a:ext uri="{FF2B5EF4-FFF2-40B4-BE49-F238E27FC236}">
+                <a16:creationId xmlns:a16="http://schemas.microsoft.com/office/drawing/2014/main" id="{F089A9ED-FB7E-102A-86B4-376C2F8F1009}"/>
+              </a:ext>
+            </a:extLst>
+          </p:cNvPr>
+          <p:cNvCxnSpPr>
+            <a:cxnSpLocks/>
+          </p:cNvCxnSpPr>
+          <p:nvPr/>
+        </p:nvCxnSpPr>
+        <p:spPr>
+          <a:xfrm>
+            <a:off x="11178790" y="3309402"/>
+            <a:ext cx="0" cy="485525"/>
+          </a:xfrm>
+          <a:prstGeom prst="line">
+            <a:avLst/>
+          </a:prstGeom>
+          <a:ln>
+            <a:solidFill>
+              <a:srgbClr val="7030A0"/>
+            </a:solidFill>
+          </a:ln>
+        </p:spPr>
+        <p:style>
+          <a:lnRef idx="2">
+            <a:schemeClr val="accent1"/>
+          </a:lnRef>
+          <a:fillRef idx="0">
+            <a:schemeClr val="accent1"/>
+          </a:fillRef>
+          <a:effectRef idx="1">
+            <a:schemeClr val="accent1"/>
+          </a:effectRef>
+          <a:fontRef idx="minor">
+            <a:schemeClr val="tx1"/>
+          </a:fontRef>
+        </p:style>
+      </p:cxnSp>
+      <p:cxnSp>
+        <p:nvCxnSpPr>
+          <p:cNvPr id="196" name="Straight Connector 195">
+            <a:extLst>
+              <a:ext uri="{FF2B5EF4-FFF2-40B4-BE49-F238E27FC236}">
+                <a16:creationId xmlns:a16="http://schemas.microsoft.com/office/drawing/2014/main" id="{795664D5-E27E-03D2-762E-9B594741E415}"/>
+              </a:ext>
+            </a:extLst>
+          </p:cNvPr>
+          <p:cNvCxnSpPr>
+            <a:cxnSpLocks/>
+          </p:cNvCxnSpPr>
+          <p:nvPr/>
+        </p:nvCxnSpPr>
+        <p:spPr>
+          <a:xfrm flipH="1">
+            <a:off x="10843846" y="3309402"/>
+            <a:ext cx="333270" cy="0"/>
+          </a:xfrm>
+          <a:prstGeom prst="line">
+            <a:avLst/>
+          </a:prstGeom>
+          <a:ln>
+            <a:solidFill>
+              <a:srgbClr val="7030A0"/>
+            </a:solidFill>
+          </a:ln>
+        </p:spPr>
+        <p:style>
+          <a:lnRef idx="2">
+            <a:schemeClr val="accent1"/>
+          </a:lnRef>
+          <a:fillRef idx="0">
+            <a:schemeClr val="accent1"/>
+          </a:fillRef>
+          <a:effectRef idx="1">
+            <a:schemeClr val="accent1"/>
+          </a:effectRef>
+          <a:fontRef idx="minor">
+            <a:schemeClr val="tx1"/>
+          </a:fontRef>
+        </p:style>
+      </p:cxnSp>
+      <p:sp>
+        <p:nvSpPr>
+          <p:cNvPr id="203" name="TextBox 202">
+            <a:extLst>
+              <a:ext uri="{FF2B5EF4-FFF2-40B4-BE49-F238E27FC236}">
+                <a16:creationId xmlns:a16="http://schemas.microsoft.com/office/drawing/2014/main" id="{4CEAF38B-427B-3FDC-BDE3-62A066B531D2}"/>
+              </a:ext>
+            </a:extLst>
+          </p:cNvPr>
+          <p:cNvSpPr txBox="1"/>
+          <p:nvPr/>
+        </p:nvSpPr>
+        <p:spPr>
+          <a:xfrm>
+            <a:off x="9991495" y="3534339"/>
+            <a:ext cx="1194558" cy="230832"/>
+          </a:xfrm>
+          <a:prstGeom prst="rect">
+            <a:avLst/>
+          </a:prstGeom>
+          <a:noFill/>
+        </p:spPr>
+        <p:txBody>
+          <a:bodyPr wrap="none" rtlCol="0">
+            <a:spAutoFit/>
+          </a:bodyPr>
+          <a:lstStyle/>
+          <a:p>
+            <a:pPr algn="ctr"/>
+            <a:r>
+              <a:rPr lang="en-US" sz="900" dirty="0" err="1">
+                <a:solidFill>
+                  <a:srgbClr val="7030A0"/>
+                </a:solidFill>
+              </a:rPr>
+              <a:t>mem_wb_load_addr</a:t>
+            </a:r>
+            <a:endParaRPr lang="en-US" sz="900" dirty="0">
+              <a:solidFill>
+                <a:srgbClr val="7030A0"/>
+              </a:solidFill>
+            </a:endParaRPr>
+          </a:p>
+        </p:txBody>
+      </p:sp>
+      <p:sp>
+        <p:nvSpPr>
+          <p:cNvPr id="204" name="TextBox 203">
+            <a:extLst>
+              <a:ext uri="{FF2B5EF4-FFF2-40B4-BE49-F238E27FC236}">
+                <a16:creationId xmlns:a16="http://schemas.microsoft.com/office/drawing/2014/main" id="{9AE34112-1DDF-FFCF-4811-19DD2213BD28}"/>
+              </a:ext>
+            </a:extLst>
+          </p:cNvPr>
+          <p:cNvSpPr txBox="1"/>
+          <p:nvPr/>
+        </p:nvSpPr>
+        <p:spPr>
+          <a:xfrm>
+            <a:off x="10015613" y="3740906"/>
+            <a:ext cx="1149674" cy="230832"/>
+          </a:xfrm>
+          <a:prstGeom prst="rect">
+            <a:avLst/>
+          </a:prstGeom>
+          <a:noFill/>
+        </p:spPr>
+        <p:txBody>
+          <a:bodyPr wrap="none" rtlCol="0">
+            <a:spAutoFit/>
+          </a:bodyPr>
+          <a:lstStyle/>
+          <a:p>
+            <a:pPr algn="ctr"/>
+            <a:r>
+              <a:rPr lang="en-US" sz="900" dirty="0" err="1">
+                <a:solidFill>
+                  <a:srgbClr val="7030A0"/>
+                </a:solidFill>
+              </a:rPr>
+              <a:t>mem_wb_reg_write</a:t>
+            </a:r>
+            <a:endParaRPr lang="en-US" sz="900" dirty="0">
+              <a:solidFill>
+                <a:srgbClr val="7030A0"/>
+              </a:solidFill>
+            </a:endParaRPr>
+          </a:p>
+        </p:txBody>
+      </p:sp>
+      <p:cxnSp>
+        <p:nvCxnSpPr>
+          <p:cNvPr id="206" name="Straight Arrow Connector 205">
+            <a:extLst>
+              <a:ext uri="{FF2B5EF4-FFF2-40B4-BE49-F238E27FC236}">
+                <a16:creationId xmlns:a16="http://schemas.microsoft.com/office/drawing/2014/main" id="{71C3CFFB-EF06-47B3-408B-B417309905EA}"/>
+              </a:ext>
+            </a:extLst>
+          </p:cNvPr>
+          <p:cNvCxnSpPr>
+            <a:cxnSpLocks/>
+          </p:cNvCxnSpPr>
+          <p:nvPr/>
+        </p:nvCxnSpPr>
+        <p:spPr>
+          <a:xfrm>
+            <a:off x="2589028" y="1197429"/>
+            <a:ext cx="2727251" cy="0"/>
           </a:xfrm>
           <a:prstGeom prst="straightConnector1">
             <a:avLst/>
@@ -11292,6 +14156,837 @@
           </a:fontRef>
         </p:style>
       </p:cxnSp>
+      <p:cxnSp>
+        <p:nvCxnSpPr>
+          <p:cNvPr id="209" name="Straight Arrow Connector 208">
+            <a:extLst>
+              <a:ext uri="{FF2B5EF4-FFF2-40B4-BE49-F238E27FC236}">
+                <a16:creationId xmlns:a16="http://schemas.microsoft.com/office/drawing/2014/main" id="{6E321B18-E51F-EFB9-FD89-4162D06C6AE3}"/>
+              </a:ext>
+            </a:extLst>
+          </p:cNvPr>
+          <p:cNvCxnSpPr>
+            <a:cxnSpLocks/>
+          </p:cNvCxnSpPr>
+          <p:nvPr/>
+        </p:nvCxnSpPr>
+        <p:spPr>
+          <a:xfrm>
+            <a:off x="914400" y="1200973"/>
+            <a:ext cx="1524421" cy="0"/>
+          </a:xfrm>
+          <a:prstGeom prst="straightConnector1">
+            <a:avLst/>
+          </a:prstGeom>
+          <a:ln>
+            <a:solidFill>
+              <a:srgbClr val="FF0000"/>
+            </a:solidFill>
+            <a:tailEnd type="triangle"/>
+          </a:ln>
+        </p:spPr>
+        <p:style>
+          <a:lnRef idx="2">
+            <a:schemeClr val="accent1"/>
+          </a:lnRef>
+          <a:fillRef idx="0">
+            <a:schemeClr val="accent1"/>
+          </a:fillRef>
+          <a:effectRef idx="1">
+            <a:schemeClr val="accent1"/>
+          </a:effectRef>
+          <a:fontRef idx="minor">
+            <a:schemeClr val="tx1"/>
+          </a:fontRef>
+        </p:style>
+      </p:cxnSp>
+      <p:cxnSp>
+        <p:nvCxnSpPr>
+          <p:cNvPr id="212" name="Straight Arrow Connector 211">
+            <a:extLst>
+              <a:ext uri="{FF2B5EF4-FFF2-40B4-BE49-F238E27FC236}">
+                <a16:creationId xmlns:a16="http://schemas.microsoft.com/office/drawing/2014/main" id="{CCA08A8D-2AA1-5882-F1D1-349C86F51C70}"/>
+              </a:ext>
+            </a:extLst>
+          </p:cNvPr>
+          <p:cNvCxnSpPr>
+            <a:cxnSpLocks/>
+          </p:cNvCxnSpPr>
+          <p:nvPr/>
+        </p:nvCxnSpPr>
+        <p:spPr>
+          <a:xfrm>
+            <a:off x="5406656" y="1190340"/>
+            <a:ext cx="1914438" cy="0"/>
+          </a:xfrm>
+          <a:prstGeom prst="straightConnector1">
+            <a:avLst/>
+          </a:prstGeom>
+          <a:ln>
+            <a:solidFill>
+              <a:srgbClr val="FF0000"/>
+            </a:solidFill>
+            <a:tailEnd type="triangle"/>
+          </a:ln>
+        </p:spPr>
+        <p:style>
+          <a:lnRef idx="2">
+            <a:schemeClr val="accent1"/>
+          </a:lnRef>
+          <a:fillRef idx="0">
+            <a:schemeClr val="accent1"/>
+          </a:fillRef>
+          <a:effectRef idx="1">
+            <a:schemeClr val="accent1"/>
+          </a:effectRef>
+          <a:fontRef idx="minor">
+            <a:schemeClr val="tx1"/>
+          </a:fontRef>
+        </p:style>
+      </p:cxnSp>
+      <p:cxnSp>
+        <p:nvCxnSpPr>
+          <p:cNvPr id="215" name="Straight Arrow Connector 214">
+            <a:extLst>
+              <a:ext uri="{FF2B5EF4-FFF2-40B4-BE49-F238E27FC236}">
+                <a16:creationId xmlns:a16="http://schemas.microsoft.com/office/drawing/2014/main" id="{FDC76F40-BE6B-4962-060D-40F47B126A07}"/>
+              </a:ext>
+            </a:extLst>
+          </p:cNvPr>
+          <p:cNvCxnSpPr>
+            <a:cxnSpLocks/>
+          </p:cNvCxnSpPr>
+          <p:nvPr/>
+        </p:nvCxnSpPr>
+        <p:spPr>
+          <a:xfrm>
+            <a:off x="7469372" y="1184376"/>
+            <a:ext cx="2383140" cy="0"/>
+          </a:xfrm>
+          <a:prstGeom prst="straightConnector1">
+            <a:avLst/>
+          </a:prstGeom>
+          <a:ln>
+            <a:solidFill>
+              <a:srgbClr val="FF0000"/>
+            </a:solidFill>
+            <a:tailEnd type="triangle"/>
+          </a:ln>
+        </p:spPr>
+        <p:style>
+          <a:lnRef idx="2">
+            <a:schemeClr val="accent1"/>
+          </a:lnRef>
+          <a:fillRef idx="0">
+            <a:schemeClr val="accent1"/>
+          </a:fillRef>
+          <a:effectRef idx="1">
+            <a:schemeClr val="accent1"/>
+          </a:effectRef>
+          <a:fontRef idx="minor">
+            <a:schemeClr val="tx1"/>
+          </a:fontRef>
+        </p:style>
+      </p:cxnSp>
+      <p:cxnSp>
+        <p:nvCxnSpPr>
+          <p:cNvPr id="218" name="Straight Arrow Connector 217">
+            <a:extLst>
+              <a:ext uri="{FF2B5EF4-FFF2-40B4-BE49-F238E27FC236}">
+                <a16:creationId xmlns:a16="http://schemas.microsoft.com/office/drawing/2014/main" id="{CD965C0D-6A5E-50AA-A6E4-25020246A6B6}"/>
+              </a:ext>
+            </a:extLst>
+          </p:cNvPr>
+          <p:cNvCxnSpPr>
+            <a:cxnSpLocks/>
+          </p:cNvCxnSpPr>
+          <p:nvPr/>
+        </p:nvCxnSpPr>
+        <p:spPr>
+          <a:xfrm>
+            <a:off x="9999921" y="1189693"/>
+            <a:ext cx="1249326" cy="0"/>
+          </a:xfrm>
+          <a:prstGeom prst="straightConnector1">
+            <a:avLst/>
+          </a:prstGeom>
+          <a:ln>
+            <a:solidFill>
+              <a:srgbClr val="FF0000"/>
+            </a:solidFill>
+            <a:tailEnd type="triangle"/>
+          </a:ln>
+        </p:spPr>
+        <p:style>
+          <a:lnRef idx="2">
+            <a:schemeClr val="accent1"/>
+          </a:lnRef>
+          <a:fillRef idx="0">
+            <a:schemeClr val="accent1"/>
+          </a:fillRef>
+          <a:effectRef idx="1">
+            <a:schemeClr val="accent1"/>
+          </a:effectRef>
+          <a:fontRef idx="minor">
+            <a:schemeClr val="tx1"/>
+          </a:fontRef>
+        </p:style>
+      </p:cxnSp>
+      <p:sp>
+        <p:nvSpPr>
+          <p:cNvPr id="352" name="TextBox 351">
+            <a:extLst>
+              <a:ext uri="{FF2B5EF4-FFF2-40B4-BE49-F238E27FC236}">
+                <a16:creationId xmlns:a16="http://schemas.microsoft.com/office/drawing/2014/main" id="{63DD9BAF-BB8C-31D5-9F6C-D10758B25C82}"/>
+              </a:ext>
+            </a:extLst>
+          </p:cNvPr>
+          <p:cNvSpPr txBox="1"/>
+          <p:nvPr/>
+        </p:nvSpPr>
+        <p:spPr>
+          <a:xfrm>
+            <a:off x="914400" y="997255"/>
+            <a:ext cx="1540806" cy="246221"/>
+          </a:xfrm>
+          <a:prstGeom prst="rect">
+            <a:avLst/>
+          </a:prstGeom>
+          <a:noFill/>
+        </p:spPr>
+        <p:txBody>
+          <a:bodyPr wrap="none" rtlCol="0">
+            <a:spAutoFit/>
+          </a:bodyPr>
+          <a:lstStyle/>
+          <a:p>
+            <a:r>
+              <a:rPr lang="en-US" sz="1000" dirty="0">
+                <a:solidFill>
+                  <a:srgbClr val="FF0000"/>
+                </a:solidFill>
+              </a:rPr>
+              <a:t>Raw Values in IF </a:t>
+            </a:r>
+            <a:r>
+              <a:rPr lang="en-US" sz="1000" dirty="0">
+                <a:solidFill>
+                  <a:srgbClr val="FF0000"/>
+                </a:solidFill>
+                <a:sym typeface="Wingdings" panose="05000000000000000000" pitchFamily="2" charset="2"/>
+              </a:rPr>
+              <a:t> IF_ID</a:t>
+            </a:r>
+            <a:endParaRPr lang="en-US" sz="1000" dirty="0">
+              <a:solidFill>
+                <a:srgbClr val="FF0000"/>
+              </a:solidFill>
+            </a:endParaRPr>
+          </a:p>
+        </p:txBody>
+      </p:sp>
+      <p:sp>
+        <p:nvSpPr>
+          <p:cNvPr id="354" name="TextBox 353">
+            <a:extLst>
+              <a:ext uri="{FF2B5EF4-FFF2-40B4-BE49-F238E27FC236}">
+                <a16:creationId xmlns:a16="http://schemas.microsoft.com/office/drawing/2014/main" id="{9C499613-746F-C9FB-EFDD-7B9E6A0FA742}"/>
+              </a:ext>
+            </a:extLst>
+          </p:cNvPr>
+          <p:cNvSpPr txBox="1"/>
+          <p:nvPr/>
+        </p:nvSpPr>
+        <p:spPr>
+          <a:xfrm>
+            <a:off x="2962063" y="984434"/>
+            <a:ext cx="2045753" cy="246221"/>
+          </a:xfrm>
+          <a:prstGeom prst="rect">
+            <a:avLst/>
+          </a:prstGeom>
+          <a:noFill/>
+        </p:spPr>
+        <p:txBody>
+          <a:bodyPr wrap="none" rtlCol="0">
+            <a:spAutoFit/>
+          </a:bodyPr>
+          <a:lstStyle/>
+          <a:p>
+            <a:r>
+              <a:rPr lang="en-US" sz="1000" dirty="0">
+                <a:solidFill>
+                  <a:srgbClr val="FF0000"/>
+                </a:solidFill>
+              </a:rPr>
+              <a:t>IF_ID Registers </a:t>
+            </a:r>
+            <a:r>
+              <a:rPr lang="en-US" sz="1000" dirty="0">
+                <a:solidFill>
+                  <a:srgbClr val="FF0000"/>
+                </a:solidFill>
+                <a:sym typeface="Wingdings" panose="05000000000000000000" pitchFamily="2" charset="2"/>
+              </a:rPr>
+              <a:t> ID_EX Registers</a:t>
+            </a:r>
+            <a:endParaRPr lang="en-US" sz="1000" dirty="0">
+              <a:solidFill>
+                <a:srgbClr val="FF0000"/>
+              </a:solidFill>
+            </a:endParaRPr>
+          </a:p>
+        </p:txBody>
+      </p:sp>
+      <p:sp>
+        <p:nvSpPr>
+          <p:cNvPr id="355" name="TextBox 354">
+            <a:extLst>
+              <a:ext uri="{FF2B5EF4-FFF2-40B4-BE49-F238E27FC236}">
+                <a16:creationId xmlns:a16="http://schemas.microsoft.com/office/drawing/2014/main" id="{6BE744BF-0AA5-08D2-5E69-E9EFD298FC89}"/>
+              </a:ext>
+            </a:extLst>
+          </p:cNvPr>
+          <p:cNvSpPr txBox="1"/>
+          <p:nvPr/>
+        </p:nvSpPr>
+        <p:spPr>
+          <a:xfrm>
+            <a:off x="5348729" y="990331"/>
+            <a:ext cx="2236510" cy="246221"/>
+          </a:xfrm>
+          <a:prstGeom prst="rect">
+            <a:avLst/>
+          </a:prstGeom>
+          <a:noFill/>
+        </p:spPr>
+        <p:txBody>
+          <a:bodyPr wrap="none" rtlCol="0">
+            <a:spAutoFit/>
+          </a:bodyPr>
+          <a:lstStyle/>
+          <a:p>
+            <a:r>
+              <a:rPr lang="en-US" sz="1000" dirty="0">
+                <a:solidFill>
+                  <a:srgbClr val="FF0000"/>
+                </a:solidFill>
+              </a:rPr>
+              <a:t>ID_EX Registers </a:t>
+            </a:r>
+            <a:r>
+              <a:rPr lang="en-US" sz="1000" dirty="0">
+                <a:solidFill>
+                  <a:srgbClr val="FF0000"/>
+                </a:solidFill>
+                <a:sym typeface="Wingdings" panose="05000000000000000000" pitchFamily="2" charset="2"/>
+              </a:rPr>
+              <a:t> EX_MEM Registers</a:t>
+            </a:r>
+            <a:endParaRPr lang="en-US" sz="1000" dirty="0">
+              <a:solidFill>
+                <a:srgbClr val="FF0000"/>
+              </a:solidFill>
+            </a:endParaRPr>
+          </a:p>
+        </p:txBody>
+      </p:sp>
+      <p:sp>
+        <p:nvSpPr>
+          <p:cNvPr id="356" name="TextBox 355">
+            <a:extLst>
+              <a:ext uri="{FF2B5EF4-FFF2-40B4-BE49-F238E27FC236}">
+                <a16:creationId xmlns:a16="http://schemas.microsoft.com/office/drawing/2014/main" id="{2DEA35EB-22F3-C249-6A01-279BB7A5353B}"/>
+              </a:ext>
+            </a:extLst>
+          </p:cNvPr>
+          <p:cNvSpPr txBox="1"/>
+          <p:nvPr/>
+        </p:nvSpPr>
+        <p:spPr>
+          <a:xfrm>
+            <a:off x="7441476" y="978088"/>
+            <a:ext cx="2436886" cy="246221"/>
+          </a:xfrm>
+          <a:prstGeom prst="rect">
+            <a:avLst/>
+          </a:prstGeom>
+          <a:noFill/>
+        </p:spPr>
+        <p:txBody>
+          <a:bodyPr wrap="none" rtlCol="0">
+            <a:spAutoFit/>
+          </a:bodyPr>
+          <a:lstStyle/>
+          <a:p>
+            <a:r>
+              <a:rPr lang="en-US" sz="1000" dirty="0">
+                <a:solidFill>
+                  <a:srgbClr val="FF0000"/>
+                </a:solidFill>
+              </a:rPr>
+              <a:t>EX_MEM Registers </a:t>
+            </a:r>
+            <a:r>
+              <a:rPr lang="en-US" sz="1000" dirty="0">
+                <a:solidFill>
+                  <a:srgbClr val="FF0000"/>
+                </a:solidFill>
+                <a:sym typeface="Wingdings" panose="05000000000000000000" pitchFamily="2" charset="2"/>
+              </a:rPr>
+              <a:t> MEM_WB Registers</a:t>
+            </a:r>
+            <a:endParaRPr lang="en-US" sz="1000" dirty="0">
+              <a:solidFill>
+                <a:srgbClr val="FF0000"/>
+              </a:solidFill>
+            </a:endParaRPr>
+          </a:p>
+        </p:txBody>
+      </p:sp>
+      <p:sp>
+        <p:nvSpPr>
+          <p:cNvPr id="357" name="TextBox 356">
+            <a:extLst>
+              <a:ext uri="{FF2B5EF4-FFF2-40B4-BE49-F238E27FC236}">
+                <a16:creationId xmlns:a16="http://schemas.microsoft.com/office/drawing/2014/main" id="{A3A92CD9-0FDC-5420-9129-4FE997971BBA}"/>
+              </a:ext>
+            </a:extLst>
+          </p:cNvPr>
+          <p:cNvSpPr txBox="1"/>
+          <p:nvPr/>
+        </p:nvSpPr>
+        <p:spPr>
+          <a:xfrm>
+            <a:off x="9947555" y="993913"/>
+            <a:ext cx="1632178" cy="246221"/>
+          </a:xfrm>
+          <a:prstGeom prst="rect">
+            <a:avLst/>
+          </a:prstGeom>
+          <a:noFill/>
+        </p:spPr>
+        <p:txBody>
+          <a:bodyPr wrap="none" rtlCol="0">
+            <a:spAutoFit/>
+          </a:bodyPr>
+          <a:lstStyle/>
+          <a:p>
+            <a:r>
+              <a:rPr lang="en-US" sz="1000" dirty="0">
+                <a:solidFill>
+                  <a:srgbClr val="FF0000"/>
+                </a:solidFill>
+              </a:rPr>
+              <a:t>MEM_WB Registers </a:t>
+            </a:r>
+            <a:r>
+              <a:rPr lang="en-US" sz="1000" dirty="0">
+                <a:solidFill>
+                  <a:srgbClr val="FF0000"/>
+                </a:solidFill>
+                <a:sym typeface="Wingdings" panose="05000000000000000000" pitchFamily="2" charset="2"/>
+              </a:rPr>
+              <a:t> Out</a:t>
+            </a:r>
+            <a:endParaRPr lang="en-US" sz="1000" dirty="0">
+              <a:solidFill>
+                <a:srgbClr val="FF0000"/>
+              </a:solidFill>
+            </a:endParaRPr>
+          </a:p>
+        </p:txBody>
+      </p:sp>
+      <p:sp>
+        <p:nvSpPr>
+          <p:cNvPr id="358" name="Rectangle 357">
+            <a:extLst>
+              <a:ext uri="{FF2B5EF4-FFF2-40B4-BE49-F238E27FC236}">
+                <a16:creationId xmlns:a16="http://schemas.microsoft.com/office/drawing/2014/main" id="{2F59B639-3F3B-9C10-3277-9732F58F2577}"/>
+              </a:ext>
+            </a:extLst>
+          </p:cNvPr>
+          <p:cNvSpPr/>
+          <p:nvPr/>
+        </p:nvSpPr>
+        <p:spPr>
+          <a:xfrm>
+            <a:off x="10145864" y="4047113"/>
+            <a:ext cx="1948033" cy="2647885"/>
+          </a:xfrm>
+          <a:prstGeom prst="rect">
+            <a:avLst/>
+          </a:prstGeom>
+          <a:solidFill>
+            <a:schemeClr val="accent2">
+              <a:lumMod val="20000"/>
+              <a:lumOff val="80000"/>
+            </a:schemeClr>
+          </a:solidFill>
+          <a:ln>
+            <a:solidFill>
+              <a:srgbClr val="FF0000"/>
+            </a:solidFill>
+          </a:ln>
+        </p:spPr>
+        <p:style>
+          <a:lnRef idx="2">
+            <a:schemeClr val="accent1">
+              <a:shade val="15000"/>
+            </a:schemeClr>
+          </a:lnRef>
+          <a:fillRef idx="1">
+            <a:schemeClr val="accent1"/>
+          </a:fillRef>
+          <a:effectRef idx="0">
+            <a:schemeClr val="accent1"/>
+          </a:effectRef>
+          <a:fontRef idx="minor">
+            <a:schemeClr val="lt1"/>
+          </a:fontRef>
+        </p:style>
+        <p:txBody>
+          <a:bodyPr rtlCol="0" anchor="ctr"/>
+          <a:lstStyle/>
+          <a:p>
+            <a:pPr algn="ctr"/>
+            <a:endParaRPr lang="en-US"/>
+          </a:p>
+        </p:txBody>
+      </p:sp>
+      <p:sp>
+        <p:nvSpPr>
+          <p:cNvPr id="359" name="TextBox 358">
+            <a:extLst>
+              <a:ext uri="{FF2B5EF4-FFF2-40B4-BE49-F238E27FC236}">
+                <a16:creationId xmlns:a16="http://schemas.microsoft.com/office/drawing/2014/main" id="{F8105C27-EB6F-0878-946D-3E26BA52B56D}"/>
+              </a:ext>
+            </a:extLst>
+          </p:cNvPr>
+          <p:cNvSpPr txBox="1"/>
+          <p:nvPr/>
+        </p:nvSpPr>
+        <p:spPr>
+          <a:xfrm>
+            <a:off x="10122090" y="4047868"/>
+            <a:ext cx="1778753" cy="261610"/>
+          </a:xfrm>
+          <a:prstGeom prst="rect">
+            <a:avLst/>
+          </a:prstGeom>
+          <a:noFill/>
+        </p:spPr>
+        <p:txBody>
+          <a:bodyPr wrap="square" rtlCol="0">
+            <a:spAutoFit/>
+          </a:bodyPr>
+          <a:lstStyle/>
+          <a:p>
+            <a:r>
+              <a:rPr lang="en-US" sz="1100" b="1" dirty="0">
+                <a:solidFill>
+                  <a:srgbClr val="FF0000"/>
+                </a:solidFill>
+              </a:rPr>
+              <a:t>Pipeline Registers</a:t>
+            </a:r>
+          </a:p>
+        </p:txBody>
+      </p:sp>
+      <p:sp>
+        <p:nvSpPr>
+          <p:cNvPr id="360" name="TextBox 359">
+            <a:extLst>
+              <a:ext uri="{FF2B5EF4-FFF2-40B4-BE49-F238E27FC236}">
+                <a16:creationId xmlns:a16="http://schemas.microsoft.com/office/drawing/2014/main" id="{E2DEFAC6-65F4-0322-2495-9BCACCAE3B96}"/>
+              </a:ext>
+            </a:extLst>
+          </p:cNvPr>
+          <p:cNvSpPr txBox="1"/>
+          <p:nvPr/>
+        </p:nvSpPr>
+        <p:spPr>
+          <a:xfrm>
+            <a:off x="10226722" y="4253940"/>
+            <a:ext cx="1792403" cy="2400657"/>
+          </a:xfrm>
+          <a:prstGeom prst="rect">
+            <a:avLst/>
+          </a:prstGeom>
+          <a:noFill/>
+        </p:spPr>
+        <p:txBody>
+          <a:bodyPr wrap="square" rtlCol="0">
+            <a:spAutoFit/>
+          </a:bodyPr>
+          <a:lstStyle/>
+          <a:p>
+            <a:pPr marL="171450" indent="-171450">
+              <a:buFont typeface="Arial" panose="020B0604020202020204" pitchFamily="34" charset="0"/>
+              <a:buChar char="•"/>
+            </a:pPr>
+            <a:r>
+              <a:rPr lang="en-US" sz="1000" dirty="0" err="1">
+                <a:solidFill>
+                  <a:srgbClr val="FF0000"/>
+                </a:solidFill>
+              </a:rPr>
+              <a:t>reg_write</a:t>
+            </a:r>
+            <a:endParaRPr lang="en-US" sz="1000" dirty="0">
+              <a:solidFill>
+                <a:srgbClr val="FF0000"/>
+              </a:solidFill>
+            </a:endParaRPr>
+          </a:p>
+          <a:p>
+            <a:pPr marL="171450" indent="-171450">
+              <a:buFont typeface="Arial" panose="020B0604020202020204" pitchFamily="34" charset="0"/>
+              <a:buChar char="•"/>
+            </a:pPr>
+            <a:r>
+              <a:rPr lang="en-US" sz="1000" dirty="0" err="1">
+                <a:solidFill>
+                  <a:srgbClr val="FF0000"/>
+                </a:solidFill>
+              </a:rPr>
+              <a:t>alu_src</a:t>
+            </a:r>
+            <a:endParaRPr lang="en-US" sz="1000" dirty="0">
+              <a:solidFill>
+                <a:srgbClr val="FF0000"/>
+              </a:solidFill>
+            </a:endParaRPr>
+          </a:p>
+          <a:p>
+            <a:pPr marL="171450" indent="-171450">
+              <a:buFont typeface="Arial" panose="020B0604020202020204" pitchFamily="34" charset="0"/>
+              <a:buChar char="•"/>
+            </a:pPr>
+            <a:r>
+              <a:rPr lang="en-US" sz="1000" dirty="0" err="1">
+                <a:solidFill>
+                  <a:srgbClr val="FF0000"/>
+                </a:solidFill>
+              </a:rPr>
+              <a:t>mem_read</a:t>
+            </a:r>
+            <a:endParaRPr lang="en-US" sz="1000" dirty="0">
+              <a:solidFill>
+                <a:srgbClr val="FF0000"/>
+              </a:solidFill>
+            </a:endParaRPr>
+          </a:p>
+          <a:p>
+            <a:pPr marL="171450" indent="-171450">
+              <a:buFont typeface="Arial" panose="020B0604020202020204" pitchFamily="34" charset="0"/>
+              <a:buChar char="•"/>
+            </a:pPr>
+            <a:r>
+              <a:rPr lang="en-US" sz="1000" dirty="0" err="1">
+                <a:solidFill>
+                  <a:srgbClr val="FF0000"/>
+                </a:solidFill>
+              </a:rPr>
+              <a:t>mem_write</a:t>
+            </a:r>
+            <a:endParaRPr lang="en-US" sz="1000" dirty="0">
+              <a:solidFill>
+                <a:srgbClr val="FF0000"/>
+              </a:solidFill>
+            </a:endParaRPr>
+          </a:p>
+          <a:p>
+            <a:pPr marL="171450" indent="-171450">
+              <a:buFont typeface="Arial" panose="020B0604020202020204" pitchFamily="34" charset="0"/>
+              <a:buChar char="•"/>
+            </a:pPr>
+            <a:r>
+              <a:rPr lang="en-US" sz="1000" dirty="0">
+                <a:solidFill>
+                  <a:srgbClr val="FF0000"/>
+                </a:solidFill>
+              </a:rPr>
+              <a:t>branch</a:t>
+            </a:r>
+          </a:p>
+          <a:p>
+            <a:pPr marL="171450" indent="-171450">
+              <a:buFont typeface="Arial" panose="020B0604020202020204" pitchFamily="34" charset="0"/>
+              <a:buChar char="•"/>
+            </a:pPr>
+            <a:r>
+              <a:rPr lang="en-US" sz="1000" dirty="0">
+                <a:solidFill>
+                  <a:srgbClr val="FF0000"/>
+                </a:solidFill>
+              </a:rPr>
+              <a:t>jump</a:t>
+            </a:r>
+          </a:p>
+          <a:p>
+            <a:pPr marL="171450" indent="-171450">
+              <a:buFont typeface="Arial" panose="020B0604020202020204" pitchFamily="34" charset="0"/>
+              <a:buChar char="•"/>
+            </a:pPr>
+            <a:r>
+              <a:rPr lang="en-US" sz="1000" dirty="0" err="1">
+                <a:solidFill>
+                  <a:srgbClr val="FF0000"/>
+                </a:solidFill>
+              </a:rPr>
+              <a:t>load_addr</a:t>
+            </a:r>
+            <a:endParaRPr lang="en-US" sz="1000" dirty="0">
+              <a:solidFill>
+                <a:srgbClr val="FF0000"/>
+              </a:solidFill>
+            </a:endParaRPr>
+          </a:p>
+          <a:p>
+            <a:pPr marL="171450" indent="-171450">
+              <a:buFont typeface="Arial" panose="020B0604020202020204" pitchFamily="34" charset="0"/>
+              <a:buChar char="•"/>
+            </a:pPr>
+            <a:r>
+              <a:rPr lang="en-US" sz="1000" dirty="0" err="1">
+                <a:solidFill>
+                  <a:srgbClr val="FF0000"/>
+                </a:solidFill>
+              </a:rPr>
+              <a:t>rd</a:t>
+            </a:r>
+            <a:endParaRPr lang="en-US" sz="1000" dirty="0">
+              <a:solidFill>
+                <a:srgbClr val="FF0000"/>
+              </a:solidFill>
+            </a:endParaRPr>
+          </a:p>
+          <a:p>
+            <a:pPr marL="171450" indent="-171450">
+              <a:buFont typeface="Arial" panose="020B0604020202020204" pitchFamily="34" charset="0"/>
+              <a:buChar char="•"/>
+            </a:pPr>
+            <a:r>
+              <a:rPr lang="en-US" sz="1000" dirty="0" err="1">
+                <a:solidFill>
+                  <a:srgbClr val="FF0000"/>
+                </a:solidFill>
+              </a:rPr>
+              <a:t>instr</a:t>
+            </a:r>
+            <a:endParaRPr lang="en-US" sz="1000" dirty="0">
+              <a:solidFill>
+                <a:srgbClr val="FF0000"/>
+              </a:solidFill>
+            </a:endParaRPr>
+          </a:p>
+          <a:p>
+            <a:pPr marL="171450" indent="-171450">
+              <a:buFont typeface="Arial" panose="020B0604020202020204" pitchFamily="34" charset="0"/>
+              <a:buChar char="•"/>
+            </a:pPr>
+            <a:r>
+              <a:rPr lang="en-US" sz="1000" dirty="0" err="1">
+                <a:solidFill>
+                  <a:srgbClr val="FF0000"/>
+                </a:solidFill>
+              </a:rPr>
+              <a:t>npc</a:t>
+            </a:r>
+            <a:endParaRPr lang="en-US" sz="1000" dirty="0">
+              <a:solidFill>
+                <a:srgbClr val="FF0000"/>
+              </a:solidFill>
+            </a:endParaRPr>
+          </a:p>
+          <a:p>
+            <a:pPr marL="171450" indent="-171450">
+              <a:buFont typeface="Arial" panose="020B0604020202020204" pitchFamily="34" charset="0"/>
+              <a:buChar char="•"/>
+            </a:pPr>
+            <a:r>
+              <a:rPr lang="en-US" sz="1000" dirty="0">
+                <a:solidFill>
+                  <a:srgbClr val="FF0000"/>
+                </a:solidFill>
+              </a:rPr>
+              <a:t>reg1_data</a:t>
+            </a:r>
+          </a:p>
+          <a:p>
+            <a:pPr marL="171450" indent="-171450">
+              <a:buFont typeface="Arial" panose="020B0604020202020204" pitchFamily="34" charset="0"/>
+              <a:buChar char="•"/>
+            </a:pPr>
+            <a:r>
+              <a:rPr lang="en-US" sz="1000" dirty="0">
+                <a:solidFill>
+                  <a:srgbClr val="FF0000"/>
+                </a:solidFill>
+              </a:rPr>
+              <a:t>reg2_data</a:t>
+            </a:r>
+          </a:p>
+          <a:p>
+            <a:pPr marL="171450" indent="-171450">
+              <a:buFont typeface="Arial" panose="020B0604020202020204" pitchFamily="34" charset="0"/>
+              <a:buChar char="•"/>
+            </a:pPr>
+            <a:r>
+              <a:rPr lang="en-US" sz="1000" dirty="0" err="1">
+                <a:solidFill>
+                  <a:srgbClr val="FF0000"/>
+                </a:solidFill>
+              </a:rPr>
+              <a:t>imm</a:t>
+            </a:r>
+            <a:endParaRPr lang="en-US" sz="1000" dirty="0">
+              <a:solidFill>
+                <a:srgbClr val="FF0000"/>
+              </a:solidFill>
+            </a:endParaRPr>
+          </a:p>
+          <a:p>
+            <a:pPr marL="171450" indent="-171450">
+              <a:buFont typeface="Arial" panose="020B0604020202020204" pitchFamily="34" charset="0"/>
+              <a:buChar char="•"/>
+            </a:pPr>
+            <a:r>
+              <a:rPr lang="en-US" sz="1000" dirty="0" err="1">
+                <a:solidFill>
+                  <a:srgbClr val="FF0000"/>
+                </a:solidFill>
+              </a:rPr>
+              <a:t>alu_result</a:t>
+            </a:r>
+            <a:endParaRPr lang="en-US" sz="1000" dirty="0">
+              <a:solidFill>
+                <a:srgbClr val="FF0000"/>
+              </a:solidFill>
+            </a:endParaRPr>
+          </a:p>
+          <a:p>
+            <a:pPr marL="171450" indent="-171450">
+              <a:buFont typeface="Arial" panose="020B0604020202020204" pitchFamily="34" charset="0"/>
+              <a:buChar char="•"/>
+            </a:pPr>
+            <a:r>
+              <a:rPr lang="en-US" sz="1000" dirty="0" err="1">
+                <a:solidFill>
+                  <a:srgbClr val="FF0000"/>
+                </a:solidFill>
+              </a:rPr>
+              <a:t>alu_op</a:t>
+            </a:r>
+            <a:endParaRPr lang="en-US" sz="1000" dirty="0">
+              <a:solidFill>
+                <a:srgbClr val="FF0000"/>
+              </a:solidFill>
+            </a:endParaRPr>
+          </a:p>
+        </p:txBody>
+      </p:sp>
     </p:spTree>
     <p:extLst>
       <p:ext uri="{BB962C8B-B14F-4D97-AF65-F5344CB8AC3E}">
@@ -11620,6 +15315,321 @@
 </a:theme>
 </file>
 
+<file path=ppt/theme/theme2.xml><?xml version="1.0" encoding="utf-8"?>
+<a:theme xmlns:a="http://schemas.openxmlformats.org/drawingml/2006/main" name="Office Theme">
+  <a:themeElements>
+    <a:clrScheme name="Office">
+      <a:dk1>
+        <a:sysClr val="windowText" lastClr="000000"/>
+      </a:dk1>
+      <a:lt1>
+        <a:sysClr val="window" lastClr="FFFFFF"/>
+      </a:lt1>
+      <a:dk2>
+        <a:srgbClr val="0E2841"/>
+      </a:dk2>
+      <a:lt2>
+        <a:srgbClr val="E8E8E8"/>
+      </a:lt2>
+      <a:accent1>
+        <a:srgbClr val="156082"/>
+      </a:accent1>
+      <a:accent2>
+        <a:srgbClr val="E97132"/>
+      </a:accent2>
+      <a:accent3>
+        <a:srgbClr val="196B24"/>
+      </a:accent3>
+      <a:accent4>
+        <a:srgbClr val="0F9ED5"/>
+      </a:accent4>
+      <a:accent5>
+        <a:srgbClr val="A02B93"/>
+      </a:accent5>
+      <a:accent6>
+        <a:srgbClr val="4EA72E"/>
+      </a:accent6>
+      <a:hlink>
+        <a:srgbClr val="467886"/>
+      </a:hlink>
+      <a:folHlink>
+        <a:srgbClr val="96607D"/>
+      </a:folHlink>
+    </a:clrScheme>
+    <a:fontScheme name="Office">
+      <a:majorFont>
+        <a:latin typeface="Aptos Display" panose="02110004020202020204"/>
+        <a:ea typeface=""/>
+        <a:cs typeface=""/>
+        <a:font script="Jpan" typeface="游ゴシック Light"/>
+        <a:font script="Hang" typeface="맑은 고딕"/>
+        <a:font script="Hans" typeface="等线 Light"/>
+        <a:font script="Hant" typeface="新細明體"/>
+        <a:font script="Arab" typeface="Times New Roman"/>
+        <a:font script="Hebr" typeface="Times New Roman"/>
+        <a:font script="Thai" typeface="Angsana New"/>
+        <a:font script="Ethi" typeface="Nyala"/>
+        <a:font script="Beng" typeface="Vrinda"/>
+        <a:font script="Gujr" typeface="Shruti"/>
+        <a:font script="Khmr" typeface="MoolBoran"/>
+        <a:font script="Knda" typeface="Tunga"/>
+        <a:font script="Guru" typeface="Raavi"/>
+        <a:font script="Cans" typeface="Euphemia"/>
+        <a:font script="Cher" typeface="Plantagenet Cherokee"/>
+        <a:font script="Yiii" typeface="Microsoft Yi Baiti"/>
+        <a:font script="Tibt" typeface="Microsoft Himalaya"/>
+        <a:font script="Thaa" typeface="MV Boli"/>
+        <a:font script="Deva" typeface="Mangal"/>
+        <a:font script="Telu" typeface="Gautami"/>
+        <a:font script="Taml" typeface="Latha"/>
+        <a:font script="Syrc" typeface="Estrangelo Edessa"/>
+        <a:font script="Orya" typeface="Kalinga"/>
+        <a:font script="Mlym" typeface="Kartika"/>
+        <a:font script="Laoo" typeface="DokChampa"/>
+        <a:font script="Sinh" typeface="Iskoola Pota"/>
+        <a:font script="Mong" typeface="Mongolian Baiti"/>
+        <a:font script="Viet" typeface="Times New Roman"/>
+        <a:font script="Uigh" typeface="Microsoft Uighur"/>
+        <a:font script="Geor" typeface="Sylfaen"/>
+        <a:font script="Armn" typeface="Arial"/>
+        <a:font script="Bugi" typeface="Leelawadee UI"/>
+        <a:font script="Bopo" typeface="Microsoft JhengHei"/>
+        <a:font script="Java" typeface="Javanese Text"/>
+        <a:font script="Lisu" typeface="Segoe UI"/>
+        <a:font script="Mymr" typeface="Myanmar Text"/>
+        <a:font script="Nkoo" typeface="Ebrima"/>
+        <a:font script="Olck" typeface="Nirmala UI"/>
+        <a:font script="Osma" typeface="Ebrima"/>
+        <a:font script="Phag" typeface="Phagspa"/>
+        <a:font script="Syrn" typeface="Estrangelo Edessa"/>
+        <a:font script="Syrj" typeface="Estrangelo Edessa"/>
+        <a:font script="Syre" typeface="Estrangelo Edessa"/>
+        <a:font script="Sora" typeface="Nirmala UI"/>
+        <a:font script="Tale" typeface="Microsoft Tai Le"/>
+        <a:font script="Talu" typeface="Microsoft New Tai Lue"/>
+        <a:font script="Tfng" typeface="Ebrima"/>
+      </a:majorFont>
+      <a:minorFont>
+        <a:latin typeface="Aptos" panose="02110004020202020204"/>
+        <a:ea typeface=""/>
+        <a:cs typeface=""/>
+        <a:font script="Jpan" typeface="游ゴシック"/>
+        <a:font script="Hang" typeface="맑은 고딕"/>
+        <a:font script="Hans" typeface="等线"/>
+        <a:font script="Hant" typeface="新細明體"/>
+        <a:font script="Arab" typeface="Arial"/>
+        <a:font script="Hebr" typeface="Arial"/>
+        <a:font script="Thai" typeface="Cordia New"/>
+        <a:font script="Ethi" typeface="Nyala"/>
+        <a:font script="Beng" typeface="Vrinda"/>
+        <a:font script="Gujr" typeface="Shruti"/>
+        <a:font script="Khmr" typeface="DaunPenh"/>
+        <a:font script="Knda" typeface="Tunga"/>
+        <a:font script="Guru" typeface="Raavi"/>
+        <a:font script="Cans" typeface="Euphemia"/>
+        <a:font script="Cher" typeface="Plantagenet Cherokee"/>
+        <a:font script="Yiii" typeface="Microsoft Yi Baiti"/>
+        <a:font script="Tibt" typeface="Microsoft Himalaya"/>
+        <a:font script="Thaa" typeface="MV Boli"/>
+        <a:font script="Deva" typeface="Mangal"/>
+        <a:font script="Telu" typeface="Gautami"/>
+        <a:font script="Taml" typeface="Latha"/>
+        <a:font script="Syrc" typeface="Estrangelo Edessa"/>
+        <a:font script="Orya" typeface="Kalinga"/>
+        <a:font script="Mlym" typeface="Kartika"/>
+        <a:font script="Laoo" typeface="DokChampa"/>
+        <a:font script="Sinh" typeface="Iskoola Pota"/>
+        <a:font script="Mong" typeface="Mongolian Baiti"/>
+        <a:font script="Viet" typeface="Arial"/>
+        <a:font script="Uigh" typeface="Microsoft Uighur"/>
+        <a:font script="Geor" typeface="Sylfaen"/>
+        <a:font script="Armn" typeface="Arial"/>
+        <a:font script="Bugi" typeface="Leelawadee UI"/>
+        <a:font script="Bopo" typeface="Microsoft JhengHei"/>
+        <a:font script="Java" typeface="Javanese Text"/>
+        <a:font script="Lisu" typeface="Segoe UI"/>
+        <a:font script="Mymr" typeface="Myanmar Text"/>
+        <a:font script="Nkoo" typeface="Ebrima"/>
+        <a:font script="Olck" typeface="Nirmala UI"/>
+        <a:font script="Osma" typeface="Ebrima"/>
+        <a:font script="Phag" typeface="Phagspa"/>
+        <a:font script="Syrn" typeface="Estrangelo Edessa"/>
+        <a:font script="Syrj" typeface="Estrangelo Edessa"/>
+        <a:font script="Syre" typeface="Estrangelo Edessa"/>
+        <a:font script="Sora" typeface="Nirmala UI"/>
+        <a:font script="Tale" typeface="Microsoft Tai Le"/>
+        <a:font script="Talu" typeface="Microsoft New Tai Lue"/>
+        <a:font script="Tfng" typeface="Ebrima"/>
+      </a:minorFont>
+    </a:fontScheme>
+    <a:fmtScheme name="Office">
+      <a:fillStyleLst>
+        <a:solidFill>
+          <a:schemeClr val="phClr"/>
+        </a:solidFill>
+        <a:gradFill rotWithShape="1">
+          <a:gsLst>
+            <a:gs pos="0">
+              <a:schemeClr val="phClr">
+                <a:lumMod val="110000"/>
+                <a:satMod val="105000"/>
+                <a:tint val="67000"/>
+              </a:schemeClr>
+            </a:gs>
+            <a:gs pos="50000">
+              <a:schemeClr val="phClr">
+                <a:lumMod val="105000"/>
+                <a:satMod val="103000"/>
+                <a:tint val="73000"/>
+              </a:schemeClr>
+            </a:gs>
+            <a:gs pos="100000">
+              <a:schemeClr val="phClr">
+                <a:lumMod val="105000"/>
+                <a:satMod val="109000"/>
+                <a:tint val="81000"/>
+              </a:schemeClr>
+            </a:gs>
+          </a:gsLst>
+          <a:lin ang="5400000" scaled="0"/>
+        </a:gradFill>
+        <a:gradFill rotWithShape="1">
+          <a:gsLst>
+            <a:gs pos="0">
+              <a:schemeClr val="phClr">
+                <a:satMod val="103000"/>
+                <a:lumMod val="102000"/>
+                <a:tint val="94000"/>
+              </a:schemeClr>
+            </a:gs>
+            <a:gs pos="50000">
+              <a:schemeClr val="phClr">
+                <a:satMod val="110000"/>
+                <a:lumMod val="100000"/>
+                <a:shade val="100000"/>
+              </a:schemeClr>
+            </a:gs>
+            <a:gs pos="100000">
+              <a:schemeClr val="phClr">
+                <a:lumMod val="99000"/>
+                <a:satMod val="120000"/>
+                <a:shade val="78000"/>
+              </a:schemeClr>
+            </a:gs>
+          </a:gsLst>
+          <a:lin ang="5400000" scaled="0"/>
+        </a:gradFill>
+      </a:fillStyleLst>
+      <a:lnStyleLst>
+        <a:ln w="12700" cap="flat" cmpd="sng" algn="ctr">
+          <a:solidFill>
+            <a:schemeClr val="phClr"/>
+          </a:solidFill>
+          <a:prstDash val="solid"/>
+          <a:miter lim="800000"/>
+        </a:ln>
+        <a:ln w="19050" cap="flat" cmpd="sng" algn="ctr">
+          <a:solidFill>
+            <a:schemeClr val="phClr"/>
+          </a:solidFill>
+          <a:prstDash val="solid"/>
+          <a:miter lim="800000"/>
+        </a:ln>
+        <a:ln w="25400" cap="flat" cmpd="sng" algn="ctr">
+          <a:solidFill>
+            <a:schemeClr val="phClr"/>
+          </a:solidFill>
+          <a:prstDash val="solid"/>
+          <a:miter lim="800000"/>
+        </a:ln>
+      </a:lnStyleLst>
+      <a:effectStyleLst>
+        <a:effectStyle>
+          <a:effectLst/>
+        </a:effectStyle>
+        <a:effectStyle>
+          <a:effectLst/>
+        </a:effectStyle>
+        <a:effectStyle>
+          <a:effectLst>
+            <a:outerShdw blurRad="57150" dist="19050" dir="5400000" algn="ctr" rotWithShape="0">
+              <a:srgbClr val="000000">
+                <a:alpha val="63000"/>
+              </a:srgbClr>
+            </a:outerShdw>
+          </a:effectLst>
+        </a:effectStyle>
+      </a:effectStyleLst>
+      <a:bgFillStyleLst>
+        <a:solidFill>
+          <a:schemeClr val="phClr"/>
+        </a:solidFill>
+        <a:solidFill>
+          <a:schemeClr val="phClr">
+            <a:tint val="95000"/>
+            <a:satMod val="170000"/>
+          </a:schemeClr>
+        </a:solidFill>
+        <a:gradFill rotWithShape="1">
+          <a:gsLst>
+            <a:gs pos="0">
+              <a:schemeClr val="phClr">
+                <a:tint val="93000"/>
+                <a:satMod val="150000"/>
+                <a:shade val="98000"/>
+                <a:lumMod val="102000"/>
+              </a:schemeClr>
+            </a:gs>
+            <a:gs pos="50000">
+              <a:schemeClr val="phClr">
+                <a:tint val="98000"/>
+                <a:satMod val="130000"/>
+                <a:shade val="90000"/>
+                <a:lumMod val="103000"/>
+              </a:schemeClr>
+            </a:gs>
+            <a:gs pos="100000">
+              <a:schemeClr val="phClr">
+                <a:shade val="63000"/>
+                <a:satMod val="120000"/>
+              </a:schemeClr>
+            </a:gs>
+          </a:gsLst>
+          <a:lin ang="5400000" scaled="0"/>
+        </a:gradFill>
+      </a:bgFillStyleLst>
+    </a:fmtScheme>
+  </a:themeElements>
+  <a:objectDefaults>
+    <a:lnDef>
+      <a:spPr/>
+      <a:bodyPr/>
+      <a:lstStyle/>
+      <a:style>
+        <a:lnRef idx="2">
+          <a:schemeClr val="accent1"/>
+        </a:lnRef>
+        <a:fillRef idx="0">
+          <a:schemeClr val="accent1"/>
+        </a:fillRef>
+        <a:effectRef idx="1">
+          <a:schemeClr val="accent1"/>
+        </a:effectRef>
+        <a:fontRef idx="minor">
+          <a:schemeClr val="tx1"/>
+        </a:fontRef>
+      </a:style>
+    </a:lnDef>
+  </a:objectDefaults>
+  <a:extraClrSchemeLst/>
+  <a:extLst>
+    <a:ext uri="{05A4C25C-085E-4340-85A3-A5531E510DB2}">
+      <thm15:themeFamily xmlns:thm15="http://schemas.microsoft.com/office/thememl/2012/main" name="Office Theme" id="{2E142A2C-CD16-42D6-873A-C26D2A0506FA}" vid="{1BDDFF52-6CD6-40A5-AB3C-68EB2F1E4D0A}"/>
+    </a:ext>
+  </a:extLst>
+</a:theme>
+</file>
+
 <file path=docMetadata/LabelInfo.xml><?xml version="1.0" encoding="utf-8"?>
 <clbl:labelList xmlns:clbl="http://schemas.microsoft.com/office/2020/mipLabelMetadata">
   <clbl:label id="{7ab80a06-f029-45c0-84d1-7dad19ce3c61}" enabled="0" method="" siteId="{7ab80a06-f029-45c0-84d1-7dad19ce3c61}" removed="1"/>
